--- a/RPA_Follow_Flowlites.pptx
+++ b/RPA_Follow_Flowlites.pptx
@@ -5,7 +5,7 @@
     <p:sldMasterId id="2147483648" r:id="rId4"/>
   </p:sldMasterIdLst>
   <p:notesMasterIdLst>
-    <p:notesMasterId r:id="rId14"/>
+    <p:notesMasterId r:id="rId15"/>
   </p:notesMasterIdLst>
   <p:sldIdLst>
     <p:sldId id="269" r:id="rId5"/>
@@ -17,6 +17,7 @@
     <p:sldId id="258" r:id="rId11"/>
     <p:sldId id="270" r:id="rId12"/>
     <p:sldId id="261" r:id="rId13"/>
+    <p:sldId id="271" r:id="rId14"/>
   </p:sldIdLst>
   <p:sldSz cx="9144000" cy="5143500" type="screen16x9"/>
   <p:notesSz cx="5143500" cy="9144000"/>
@@ -1129,6 +1130,121 @@
     <p:extLst>
       <p:ext uri="{BB962C8B-B14F-4D97-AF65-F5344CB8AC3E}">
         <p14:creationId xmlns:p14="http://schemas.microsoft.com/office/powerpoint/2010/main" val="1024086991"/>
+      </p:ext>
+    </p:extLst>
+  </p:cSld>
+  <p:clrMapOvr>
+    <a:masterClrMapping/>
+  </p:clrMapOvr>
+</p:notes>
+</file>
+
+<file path=ppt/notesSlides/notesSlide8.xml><?xml version="1.0" encoding="utf-8"?>
+<p:notes xmlns:a="http://schemas.openxmlformats.org/drawingml/2006/main" xmlns:r="http://schemas.openxmlformats.org/officeDocument/2006/relationships" xmlns:p="http://schemas.openxmlformats.org/presentationml/2006/main">
+  <p:cSld>
+    <p:spTree>
+      <p:nvGrpSpPr>
+        <p:cNvPr id="1" name="">
+          <a:extLst>
+            <a:ext uri="{FF2B5EF4-FFF2-40B4-BE49-F238E27FC236}">
+              <a16:creationId xmlns:a16="http://schemas.microsoft.com/office/drawing/2014/main" id="{16BAF5FD-90CC-B33A-A84E-F9C9FCC840A4}"/>
+            </a:ext>
+          </a:extLst>
+        </p:cNvPr>
+        <p:cNvGrpSpPr/>
+        <p:nvPr/>
+      </p:nvGrpSpPr>
+      <p:grpSpPr>
+        <a:xfrm>
+          <a:off x="0" y="0"/>
+          <a:ext cx="0" cy="0"/>
+          <a:chOff x="0" y="0"/>
+          <a:chExt cx="0" cy="0"/>
+        </a:xfrm>
+      </p:grpSpPr>
+      <p:sp>
+        <p:nvSpPr>
+          <p:cNvPr id="2" name="Slide Image Placeholder 1">
+            <a:extLst>
+              <a:ext uri="{FF2B5EF4-FFF2-40B4-BE49-F238E27FC236}">
+                <a16:creationId xmlns:a16="http://schemas.microsoft.com/office/drawing/2014/main" id="{19A19943-9DFD-C87E-B091-01EA70DD998F}"/>
+              </a:ext>
+            </a:extLst>
+          </p:cNvPr>
+          <p:cNvSpPr>
+            <a:spLocks noGrp="1" noRot="1" noChangeAspect="1"/>
+          </p:cNvSpPr>
+          <p:nvPr>
+            <p:ph type="sldImg"/>
+          </p:nvPr>
+        </p:nvSpPr>
+        <p:spPr/>
+        <p:txBody>
+          <a:bodyPr/>
+          <a:lstStyle/>
+          <a:p>
+            <a:endParaRPr lang="en-US"/>
+          </a:p>
+        </p:txBody>
+      </p:sp>
+      <p:sp>
+        <p:nvSpPr>
+          <p:cNvPr id="3" name="Notes Placeholder 2">
+            <a:extLst>
+              <a:ext uri="{FF2B5EF4-FFF2-40B4-BE49-F238E27FC236}">
+                <a16:creationId xmlns:a16="http://schemas.microsoft.com/office/drawing/2014/main" id="{0F998342-5952-0F82-989F-9BDF72FF03DC}"/>
+              </a:ext>
+            </a:extLst>
+          </p:cNvPr>
+          <p:cNvSpPr>
+            <a:spLocks noGrp="1"/>
+          </p:cNvSpPr>
+          <p:nvPr>
+            <p:ph type="body" idx="1"/>
+          </p:nvPr>
+        </p:nvSpPr>
+        <p:spPr/>
+        <p:txBody>
+          <a:bodyPr/>
+          <a:lstStyle/>
+          <a:p>
+            <a:endParaRPr lang="en-US" dirty="0"/>
+          </a:p>
+        </p:txBody>
+      </p:sp>
+      <p:sp>
+        <p:nvSpPr>
+          <p:cNvPr id="4" name="Slide Number Placeholder 3">
+            <a:extLst>
+              <a:ext uri="{FF2B5EF4-FFF2-40B4-BE49-F238E27FC236}">
+                <a16:creationId xmlns:a16="http://schemas.microsoft.com/office/drawing/2014/main" id="{525D315D-D265-1319-9CEE-4BB858818C50}"/>
+              </a:ext>
+            </a:extLst>
+          </p:cNvPr>
+          <p:cNvSpPr>
+            <a:spLocks noGrp="1"/>
+          </p:cNvSpPr>
+          <p:nvPr>
+            <p:ph type="sldNum" sz="quarter" idx="10"/>
+          </p:nvPr>
+        </p:nvSpPr>
+        <p:spPr/>
+        <p:txBody>
+          <a:bodyPr/>
+          <a:lstStyle/>
+          <a:p>
+            <a:fld id="{F7021451-1387-4CA6-816F-3879F97B5CBC}" type="slidenum">
+              <a:rPr lang="en-US"/>
+              <a:t>10</a:t>
+            </a:fld>
+            <a:endParaRPr lang="en-US"/>
+          </a:p>
+        </p:txBody>
+      </p:sp>
+    </p:spTree>
+    <p:extLst>
+      <p:ext uri="{BB962C8B-B14F-4D97-AF65-F5344CB8AC3E}">
+        <p14:creationId xmlns:p14="http://schemas.microsoft.com/office/powerpoint/2010/main" val="196200455"/>
       </p:ext>
     </p:extLst>
   </p:cSld>
@@ -1472,195 +1588,1162 @@
           <a:chExt cx="0" cy="0"/>
         </a:xfrm>
       </p:grpSpPr>
-      <p:graphicFrame>
-        <p:nvGraphicFramePr>
-          <p:cNvPr id="3" name="Table 2">
-            <a:extLst>
-              <a:ext uri="{FF2B5EF4-FFF2-40B4-BE49-F238E27FC236}">
-                <a16:creationId xmlns:a16="http://schemas.microsoft.com/office/drawing/2014/main" id="{14CF02F7-DB53-76C0-C31C-0064AED50996}"/>
-              </a:ext>
-            </a:extLst>
-          </p:cNvPr>
-          <p:cNvGraphicFramePr>
-            <a:graphicFrameLocks noGrp="1"/>
-          </p:cNvGraphicFramePr>
-          <p:nvPr>
-            <p:extLst>
-              <p:ext uri="{D42A27DB-BD31-4B8C-83A1-F6EECF244321}">
-                <p14:modId xmlns:p14="http://schemas.microsoft.com/office/powerpoint/2010/main" val="2496489215"/>
-              </p:ext>
-            </p:extLst>
-          </p:nvPr>
-        </p:nvGraphicFramePr>
-        <p:xfrm>
-          <a:off x="1397140" y="678179"/>
-          <a:ext cx="4372179" cy="1645920"/>
-        </p:xfrm>
-        <a:graphic>
-          <a:graphicData uri="http://schemas.openxmlformats.org/drawingml/2006/table">
-            <a:tbl>
-              <a:tblPr firstRow="1" bandRow="1">
-                <a:tableStyleId>{5C22544A-7EE6-4342-B048-85BDC9FD1C3A}</a:tableStyleId>
-              </a:tblPr>
-              <a:tblGrid>
-                <a:gridCol w="1457393">
-                  <a:extLst>
-                    <a:ext uri="{9D8B030D-6E8A-4147-A177-3AD203B41FA5}">
-                      <a16:colId xmlns:a16="http://schemas.microsoft.com/office/drawing/2014/main" val="3374087191"/>
-                    </a:ext>
-                  </a:extLst>
-                </a:gridCol>
-                <a:gridCol w="1457393">
-                  <a:extLst>
-                    <a:ext uri="{9D8B030D-6E8A-4147-A177-3AD203B41FA5}">
-                      <a16:colId xmlns:a16="http://schemas.microsoft.com/office/drawing/2014/main" val="3706843718"/>
-                    </a:ext>
-                  </a:extLst>
-                </a:gridCol>
-                <a:gridCol w="1457393">
-                  <a:extLst>
-                    <a:ext uri="{9D8B030D-6E8A-4147-A177-3AD203B41FA5}">
-                      <a16:colId xmlns:a16="http://schemas.microsoft.com/office/drawing/2014/main" val="3007739688"/>
-                    </a:ext>
-                  </a:extLst>
-                </a:gridCol>
-              </a:tblGrid>
-              <a:tr h="485556">
-                <a:tc>
-                  <a:txBody>
-                    <a:bodyPr/>
-                    <a:lstStyle/>
-                    <a:p>
-                      <a:r>
-                        <a:rPr lang="en-US" dirty="0"/>
-                        <a:t>No.</a:t>
-                      </a:r>
-                    </a:p>
-                  </a:txBody>
-                  <a:tcPr/>
-                </a:tc>
-                <a:tc>
-                  <a:txBody>
-                    <a:bodyPr/>
-                    <a:lstStyle/>
-                    <a:p>
-                      <a:r>
-                        <a:rPr lang="en-US" dirty="0"/>
-                        <a:t>Applications Name</a:t>
-                      </a:r>
-                    </a:p>
-                  </a:txBody>
-                  <a:tcPr/>
-                </a:tc>
-                <a:tc>
-                  <a:txBody>
-                    <a:bodyPr/>
-                    <a:lstStyle/>
-                    <a:p>
-                      <a:r>
-                        <a:rPr lang="en-US" dirty="0"/>
-                        <a:t>Applications Remain QTY</a:t>
-                      </a:r>
-                    </a:p>
-                  </a:txBody>
-                  <a:tcPr/>
-                </a:tc>
-                <a:extLst>
-                  <a:ext uri="{0D108BD9-81ED-4DB2-BD59-A6C34878D82A}">
-                    <a16:rowId xmlns:a16="http://schemas.microsoft.com/office/drawing/2014/main" val="4160777838"/>
-                  </a:ext>
-                </a:extLst>
-              </a:tr>
-              <a:tr h="485556">
-                <a:tc>
-                  <a:txBody>
-                    <a:bodyPr/>
-                    <a:lstStyle/>
-                    <a:p>
-                      <a:r>
-                        <a:rPr lang="en-US" dirty="0"/>
-                        <a:t>App </a:t>
-                      </a:r>
-                      <a:r>
-                        <a:rPr lang="th-TH" dirty="0"/>
-                        <a:t>1-7 เยอะสุด ตกค้าง*</a:t>
-                      </a:r>
-                      <a:endParaRPr lang="en-US" dirty="0"/>
-                    </a:p>
-                  </a:txBody>
-                  <a:tcPr/>
-                </a:tc>
-                <a:tc>
-                  <a:txBody>
-                    <a:bodyPr/>
-                    <a:lstStyle/>
-                    <a:p>
-                      <a:endParaRPr lang="en-US" dirty="0"/>
-                    </a:p>
-                  </a:txBody>
-                  <a:tcPr/>
-                </a:tc>
-                <a:tc>
-                  <a:txBody>
-                    <a:bodyPr/>
-                    <a:lstStyle/>
-                    <a:p>
-                      <a:endParaRPr lang="en-US"/>
-                    </a:p>
-                  </a:txBody>
-                  <a:tcPr/>
-                </a:tc>
-                <a:extLst>
-                  <a:ext uri="{0D108BD9-81ED-4DB2-BD59-A6C34878D82A}">
-                    <a16:rowId xmlns:a16="http://schemas.microsoft.com/office/drawing/2014/main" val="543304547"/>
-                  </a:ext>
-                </a:extLst>
-              </a:tr>
-              <a:tr h="277461">
-                <a:tc>
-                  <a:txBody>
-                    <a:bodyPr/>
-                    <a:lstStyle/>
-                    <a:p>
-                      <a:endParaRPr lang="en-US" dirty="0"/>
-                    </a:p>
-                  </a:txBody>
-                  <a:tcPr/>
-                </a:tc>
-                <a:tc>
-                  <a:txBody>
-                    <a:bodyPr/>
-                    <a:lstStyle/>
-                    <a:p>
-                      <a:endParaRPr lang="en-US" dirty="0"/>
-                    </a:p>
-                  </a:txBody>
-                  <a:tcPr/>
-                </a:tc>
-                <a:tc>
-                  <a:txBody>
-                    <a:bodyPr/>
-                    <a:lstStyle/>
-                    <a:p>
-                      <a:endParaRPr lang="en-US" dirty="0"/>
-                    </a:p>
-                  </a:txBody>
-                  <a:tcPr/>
-                </a:tc>
-                <a:extLst>
-                  <a:ext uri="{0D108BD9-81ED-4DB2-BD59-A6C34878D82A}">
-                    <a16:rowId xmlns:a16="http://schemas.microsoft.com/office/drawing/2014/main" val="4249998980"/>
-                  </a:ext>
-                </a:extLst>
-              </a:tr>
-            </a:tbl>
-          </a:graphicData>
-        </a:graphic>
-      </p:graphicFrame>
     </p:spTree>
     <p:extLst>
       <p:ext uri="{BB962C8B-B14F-4D97-AF65-F5344CB8AC3E}">
         <p14:creationId xmlns:p14="http://schemas.microsoft.com/office/powerpoint/2010/main" val="2438535770"/>
+      </p:ext>
+    </p:extLst>
+  </p:cSld>
+  <p:clrMapOvr>
+    <a:masterClrMapping/>
+  </p:clrMapOvr>
+</p:sld>
+</file>
+
+<file path=ppt/slides/slide10.xml><?xml version="1.0" encoding="utf-8"?>
+<p:sld xmlns:a="http://schemas.openxmlformats.org/drawingml/2006/main" xmlns:r="http://schemas.openxmlformats.org/officeDocument/2006/relationships" xmlns:p="http://schemas.openxmlformats.org/presentationml/2006/main">
+  <p:cSld>
+    <p:spTree>
+      <p:nvGrpSpPr>
+        <p:cNvPr id="1" name="">
+          <a:extLst>
+            <a:ext uri="{FF2B5EF4-FFF2-40B4-BE49-F238E27FC236}">
+              <a16:creationId xmlns:a16="http://schemas.microsoft.com/office/drawing/2014/main" id="{00839403-202B-6548-B478-D8548B2A54AC}"/>
+            </a:ext>
+          </a:extLst>
+        </p:cNvPr>
+        <p:cNvGrpSpPr/>
+        <p:nvPr/>
+      </p:nvGrpSpPr>
+      <p:grpSpPr>
+        <a:xfrm>
+          <a:off x="0" y="0"/>
+          <a:ext cx="0" cy="0"/>
+          <a:chOff x="0" y="0"/>
+          <a:chExt cx="0" cy="0"/>
+        </a:xfrm>
+      </p:grpSpPr>
+      <p:sp>
+        <p:nvSpPr>
+          <p:cNvPr id="2" name="header bar">
+            <a:extLst>
+              <a:ext uri="{FF2B5EF4-FFF2-40B4-BE49-F238E27FC236}">
+                <a16:creationId xmlns:a16="http://schemas.microsoft.com/office/drawing/2014/main" id="{53F7B5A4-CFEB-6685-84D2-379469E891F1}"/>
+              </a:ext>
+              <a:ext uri="{C183D7F6-B498-43B3-948B-1728B52AA6E4}">
+                <adec:decorative xmlns:adec="http://schemas.microsoft.com/office/drawing/2017/decorative" val="1"/>
+              </a:ext>
+            </a:extLst>
+          </p:cNvPr>
+          <p:cNvSpPr/>
+          <p:nvPr/>
+        </p:nvSpPr>
+        <p:spPr>
+          <a:xfrm>
+            <a:off x="0" y="0"/>
+            <a:ext cx="9144000" cy="658368"/>
+          </a:xfrm>
+          <a:prstGeom prst="rect">
+            <a:avLst/>
+          </a:prstGeom>
+          <a:solidFill>
+            <a:srgbClr val="0E2A4D"/>
+          </a:solidFill>
+          <a:ln w="12700">
+            <a:solidFill>
+              <a:srgbClr val="0E2A4D"/>
+            </a:solidFill>
+            <a:prstDash val="solid"/>
+          </a:ln>
+        </p:spPr>
+        <p:txBody>
+          <a:bodyPr/>
+          <a:lstStyle/>
+          <a:p>
+            <a:endParaRPr lang="en-US"/>
+          </a:p>
+        </p:txBody>
+      </p:sp>
+      <p:sp>
+        <p:nvSpPr>
+          <p:cNvPr id="3" name="accent line">
+            <a:extLst>
+              <a:ext uri="{FF2B5EF4-FFF2-40B4-BE49-F238E27FC236}">
+                <a16:creationId xmlns:a16="http://schemas.microsoft.com/office/drawing/2014/main" id="{5FA832C4-E8CC-7698-7578-A0A117275C99}"/>
+              </a:ext>
+              <a:ext uri="{C183D7F6-B498-43B3-948B-1728B52AA6E4}">
+                <adec:decorative xmlns:adec="http://schemas.microsoft.com/office/drawing/2017/decorative" val="1"/>
+              </a:ext>
+            </a:extLst>
+          </p:cNvPr>
+          <p:cNvSpPr/>
+          <p:nvPr/>
+        </p:nvSpPr>
+        <p:spPr>
+          <a:xfrm>
+            <a:off x="0" y="658368"/>
+            <a:ext cx="9144000" cy="45720"/>
+          </a:xfrm>
+          <a:prstGeom prst="rect">
+            <a:avLst/>
+          </a:prstGeom>
+          <a:solidFill>
+            <a:srgbClr val="2B7CD3"/>
+          </a:solidFill>
+          <a:ln w="12700">
+            <a:solidFill>
+              <a:srgbClr val="2B7CD3"/>
+            </a:solidFill>
+            <a:prstDash val="solid"/>
+          </a:ln>
+        </p:spPr>
+        <p:txBody>
+          <a:bodyPr/>
+          <a:lstStyle/>
+          <a:p>
+            <a:endParaRPr lang="en-US"/>
+          </a:p>
+        </p:txBody>
+      </p:sp>
+      <p:sp>
+        <p:nvSpPr>
+          <p:cNvPr id="4" name="Text 2">
+            <a:extLst>
+              <a:ext uri="{FF2B5EF4-FFF2-40B4-BE49-F238E27FC236}">
+                <a16:creationId xmlns:a16="http://schemas.microsoft.com/office/drawing/2014/main" id="{DF8B0BDC-825F-7013-01B4-4B46BF5C7C78}"/>
+              </a:ext>
+            </a:extLst>
+          </p:cNvPr>
+          <p:cNvSpPr/>
+          <p:nvPr/>
+        </p:nvSpPr>
+        <p:spPr>
+          <a:xfrm>
+            <a:off x="411480" y="54864"/>
+            <a:ext cx="7589520" cy="548640"/>
+          </a:xfrm>
+          <a:prstGeom prst="rect">
+            <a:avLst/>
+          </a:prstGeom>
+          <a:noFill/>
+          <a:ln/>
+        </p:spPr>
+        <p:txBody>
+          <a:bodyPr wrap="square" lIns="0" tIns="0" rIns="0" bIns="0" rtlCol="0" anchor="ctr"/>
+          <a:lstStyle/>
+          <a:p>
+            <a:pPr marL="0" indent="0">
+              <a:buNone/>
+            </a:pPr>
+            <a:r>
+              <a:rPr lang="en-US" sz="2000" b="1" dirty="0">
+                <a:solidFill>
+                  <a:srgbClr val="FFFFFF"/>
+                </a:solidFill>
+                <a:latin typeface="Tahoma" pitchFamily="34" charset="0"/>
+                <a:ea typeface="Tahoma" pitchFamily="34" charset="-122"/>
+                <a:cs typeface="Tahoma" pitchFamily="34" charset="-120"/>
+              </a:rPr>
+              <a:t>The System in Action</a:t>
+            </a:r>
+            <a:r>
+              <a:rPr lang="en-US" sz="2000" b="1">
+                <a:solidFill>
+                  <a:srgbClr val="FFFFFF"/>
+                </a:solidFill>
+                <a:latin typeface="Tahoma" pitchFamily="34" charset="0"/>
+                <a:ea typeface="Tahoma" pitchFamily="34" charset="-122"/>
+                <a:cs typeface="Tahoma" pitchFamily="34" charset="-120"/>
+              </a:rPr>
+              <a:t>  /  </a:t>
+            </a:r>
+            <a:r>
+              <a:rPr lang="th-TH" sz="2000" b="1">
+                <a:solidFill>
+                  <a:srgbClr val="FFFFFF"/>
+                </a:solidFill>
+                <a:latin typeface="Tahoma" pitchFamily="34" charset="0"/>
+                <a:ea typeface="Tahoma" pitchFamily="34" charset="-122"/>
+                <a:cs typeface="Tahoma" pitchFamily="34" charset="-120"/>
+              </a:rPr>
+              <a:t>ภาพการทำงานจริง</a:t>
+            </a:r>
+            <a:endParaRPr lang="en-US" sz="2000" dirty="0"/>
+          </a:p>
+        </p:txBody>
+      </p:sp>
+      <p:sp>
+        <p:nvSpPr>
+          <p:cNvPr id="5" name="Text 3">
+            <a:extLst>
+              <a:ext uri="{FF2B5EF4-FFF2-40B4-BE49-F238E27FC236}">
+                <a16:creationId xmlns:a16="http://schemas.microsoft.com/office/drawing/2014/main" id="{B5E16018-06C9-7502-C2AB-FA64A0452BA3}"/>
+              </a:ext>
+            </a:extLst>
+          </p:cNvPr>
+          <p:cNvSpPr/>
+          <p:nvPr/>
+        </p:nvSpPr>
+        <p:spPr>
+          <a:xfrm>
+            <a:off x="8321040" y="54864"/>
+            <a:ext cx="457200" cy="548640"/>
+          </a:xfrm>
+          <a:prstGeom prst="rect">
+            <a:avLst/>
+          </a:prstGeom>
+          <a:noFill/>
+          <a:ln/>
+        </p:spPr>
+        <p:txBody>
+          <a:bodyPr wrap="square" lIns="0" tIns="0" rIns="0" bIns="0" rtlCol="0" anchor="ctr"/>
+          <a:lstStyle/>
+          <a:p>
+            <a:pPr marL="0" indent="0" algn="r">
+              <a:buNone/>
+            </a:pPr>
+            <a:r>
+              <a:rPr lang="en-US" sz="1400">
+                <a:solidFill>
+                  <a:srgbClr val="FFFFFF"/>
+                </a:solidFill>
+                <a:latin typeface="Tahoma" pitchFamily="34" charset="0"/>
+                <a:ea typeface="Tahoma" pitchFamily="34" charset="-122"/>
+                <a:cs typeface="Tahoma" pitchFamily="34" charset="-120"/>
+              </a:rPr>
+              <a:t>4</a:t>
+            </a:r>
+            <a:endParaRPr lang="en-US" sz="1400" dirty="0"/>
+          </a:p>
+        </p:txBody>
+      </p:sp>
+      <p:sp>
+        <p:nvSpPr>
+          <p:cNvPr id="6" name="Text 4">
+            <a:extLst>
+              <a:ext uri="{FF2B5EF4-FFF2-40B4-BE49-F238E27FC236}">
+                <a16:creationId xmlns:a16="http://schemas.microsoft.com/office/drawing/2014/main" id="{0EB17649-B500-5E20-6C9C-6C3B136E40BF}"/>
+              </a:ext>
+            </a:extLst>
+          </p:cNvPr>
+          <p:cNvSpPr/>
+          <p:nvPr/>
+        </p:nvSpPr>
+        <p:spPr>
+          <a:xfrm>
+            <a:off x="411480" y="868680"/>
+            <a:ext cx="8321040" cy="457200"/>
+          </a:xfrm>
+          <a:prstGeom prst="rect">
+            <a:avLst/>
+          </a:prstGeom>
+          <a:noFill/>
+          <a:ln/>
+        </p:spPr>
+        <p:txBody>
+          <a:bodyPr wrap="square" lIns="0" tIns="0" rIns="0" bIns="0" rtlCol="0" anchor="ctr"/>
+          <a:lstStyle/>
+          <a:p>
+            <a:pPr marL="0" indent="0">
+              <a:buNone/>
+            </a:pPr>
+            <a:r>
+              <a:rPr lang="en-US" sz="1400" b="1">
+                <a:solidFill>
+                  <a:srgbClr val="2B7CD3"/>
+                </a:solidFill>
+                <a:latin typeface="Tahoma" pitchFamily="34" charset="0"/>
+                <a:ea typeface="Tahoma" pitchFamily="34" charset="-122"/>
+                <a:cs typeface="Tahoma" pitchFamily="34" charset="-120"/>
+              </a:rPr>
+              <a:t>EVIDENCE : </a:t>
+            </a:r>
+            <a:r>
+              <a:rPr lang="en-US" sz="1400" b="1" dirty="0">
+                <a:solidFill>
+                  <a:srgbClr val="2B7CD3"/>
+                </a:solidFill>
+                <a:latin typeface="Tahoma" pitchFamily="34" charset="0"/>
+                <a:ea typeface="Tahoma" pitchFamily="34" charset="-122"/>
+                <a:cs typeface="Tahoma" pitchFamily="34" charset="-120"/>
+              </a:rPr>
+              <a:t>the </a:t>
+            </a:r>
+            <a:r>
+              <a:rPr lang="en-US" sz="1400" b="1">
+                <a:solidFill>
+                  <a:srgbClr val="2B7CD3"/>
+                </a:solidFill>
+                <a:latin typeface="Tahoma" pitchFamily="34" charset="0"/>
+                <a:ea typeface="Tahoma" pitchFamily="34" charset="-122"/>
+                <a:cs typeface="Tahoma" pitchFamily="34" charset="-120"/>
+              </a:rPr>
+              <a:t>live workflow and </a:t>
+            </a:r>
+            <a:r>
+              <a:rPr lang="en-US" sz="1400" b="1" dirty="0">
+                <a:solidFill>
+                  <a:srgbClr val="2B7CD3"/>
+                </a:solidFill>
+                <a:latin typeface="Tahoma" pitchFamily="34" charset="0"/>
+                <a:ea typeface="Tahoma" pitchFamily="34" charset="-122"/>
+                <a:cs typeface="Tahoma" pitchFamily="34" charset="-120"/>
+              </a:rPr>
+              <a:t>the </a:t>
+            </a:r>
+            <a:r>
+              <a:rPr lang="en-US" sz="1400" b="1">
+                <a:solidFill>
+                  <a:srgbClr val="2B7CD3"/>
+                </a:solidFill>
+                <a:latin typeface="Tahoma" pitchFamily="34" charset="0"/>
+                <a:ea typeface="Tahoma" pitchFamily="34" charset="-122"/>
+                <a:cs typeface="Tahoma" pitchFamily="34" charset="-120"/>
+              </a:rPr>
+              <a:t>mail</a:t>
+            </a:r>
+            <a:r>
+              <a:rPr lang="en-US" sz="1400" b="1" dirty="0">
+                <a:solidFill>
+                  <a:srgbClr val="2B7CD3"/>
+                </a:solidFill>
+                <a:latin typeface="Tahoma" pitchFamily="34" charset="0"/>
+                <a:ea typeface="Tahoma" pitchFamily="34" charset="-122"/>
+                <a:cs typeface="Tahoma" pitchFamily="34" charset="-120"/>
+              </a:rPr>
+              <a:t> </a:t>
+            </a:r>
+            <a:r>
+              <a:rPr lang="en-US" sz="1400" b="1">
+                <a:solidFill>
+                  <a:srgbClr val="2B7CD3"/>
+                </a:solidFill>
+                <a:latin typeface="Tahoma" pitchFamily="34" charset="0"/>
+                <a:ea typeface="Tahoma" pitchFamily="34" charset="-122"/>
+                <a:cs typeface="Tahoma" pitchFamily="34" charset="-120"/>
+              </a:rPr>
+              <a:t>it sends to each approver  /  </a:t>
+            </a:r>
+            <a:r>
+              <a:rPr lang="th-TH" sz="1400" b="1">
+                <a:solidFill>
+                  <a:srgbClr val="2B7CD3"/>
+                </a:solidFill>
+                <a:latin typeface="Tahoma" pitchFamily="34" charset="0"/>
+                <a:ea typeface="Tahoma" pitchFamily="34" charset="-122"/>
+                <a:cs typeface="Tahoma" pitchFamily="34" charset="-120"/>
+              </a:rPr>
+              <a:t>หลักฐาน : ภาพขั้นตอนจริงและอีเมลที่ระบบส่งออกไป</a:t>
+            </a:r>
+            <a:endParaRPr lang="en-US" sz="1400" dirty="0"/>
+          </a:p>
+        </p:txBody>
+      </p:sp>
+      <p:sp>
+        <p:nvSpPr>
+          <p:cNvPr id="7" name="card">
+            <a:extLst>
+              <a:ext uri="{FF2B5EF4-FFF2-40B4-BE49-F238E27FC236}">
+                <a16:creationId xmlns:a16="http://schemas.microsoft.com/office/drawing/2014/main" id="{B726CB84-5B6A-50A3-9A2E-E9A9F152E416}"/>
+              </a:ext>
+              <a:ext uri="{C183D7F6-B498-43B3-948B-1728B52AA6E4}">
+                <adec:decorative xmlns:adec="http://schemas.microsoft.com/office/drawing/2017/decorative" val="1"/>
+              </a:ext>
+            </a:extLst>
+          </p:cNvPr>
+          <p:cNvSpPr/>
+          <p:nvPr/>
+        </p:nvSpPr>
+        <p:spPr>
+          <a:xfrm>
+            <a:off x="228600" y="1463040"/>
+            <a:ext cx="4023360" cy="3063240"/>
+          </a:xfrm>
+          <a:prstGeom prst="rect">
+            <a:avLst/>
+          </a:prstGeom>
+          <a:solidFill>
+            <a:srgbClr val="F2F6FB"/>
+          </a:solidFill>
+          <a:ln w="12700">
+            <a:solidFill>
+              <a:srgbClr val="D7E0EA"/>
+            </a:solidFill>
+            <a:prstDash val="solid"/>
+          </a:ln>
+        </p:spPr>
+        <p:txBody>
+          <a:bodyPr/>
+          <a:lstStyle/>
+          <a:p>
+            <a:endParaRPr lang="en-US"/>
+          </a:p>
+        </p:txBody>
+      </p:sp>
+      <p:sp>
+        <p:nvSpPr>
+          <p:cNvPr id="8" name="panel header">
+            <a:extLst>
+              <a:ext uri="{FF2B5EF4-FFF2-40B4-BE49-F238E27FC236}">
+                <a16:creationId xmlns:a16="http://schemas.microsoft.com/office/drawing/2014/main" id="{E78E21D0-DC6F-A9C3-2CDB-91C055383088}"/>
+              </a:ext>
+              <a:ext uri="{C183D7F6-B498-43B3-948B-1728B52AA6E4}">
+                <adec:decorative xmlns:adec="http://schemas.microsoft.com/office/drawing/2017/decorative" val="1"/>
+              </a:ext>
+            </a:extLst>
+          </p:cNvPr>
+          <p:cNvSpPr/>
+          <p:nvPr/>
+        </p:nvSpPr>
+        <p:spPr>
+          <a:xfrm>
+            <a:off x="228600" y="1463040"/>
+            <a:ext cx="4023360" cy="384048"/>
+          </a:xfrm>
+          <a:prstGeom prst="rect">
+            <a:avLst/>
+          </a:prstGeom>
+          <a:solidFill>
+            <a:srgbClr val="0E2A4D"/>
+          </a:solidFill>
+          <a:ln w="12700">
+            <a:solidFill>
+              <a:srgbClr val="0E2A4D"/>
+            </a:solidFill>
+            <a:prstDash val="solid"/>
+          </a:ln>
+        </p:spPr>
+        <p:txBody>
+          <a:bodyPr/>
+          <a:lstStyle/>
+          <a:p>
+            <a:endParaRPr lang="en-US"/>
+          </a:p>
+        </p:txBody>
+      </p:sp>
+      <p:sp>
+        <p:nvSpPr>
+          <p:cNvPr id="9" name="Text 7">
+            <a:extLst>
+              <a:ext uri="{FF2B5EF4-FFF2-40B4-BE49-F238E27FC236}">
+                <a16:creationId xmlns:a16="http://schemas.microsoft.com/office/drawing/2014/main" id="{8D0FB5F1-6240-7841-83CF-6311F623E631}"/>
+              </a:ext>
+              <a:ext uri="{C183D7F6-B498-43B3-948B-1728B52AA6E4}">
+                <adec:decorative xmlns:adec="http://schemas.microsoft.com/office/drawing/2017/decorative" val="0"/>
+              </a:ext>
+            </a:extLst>
+          </p:cNvPr>
+          <p:cNvSpPr/>
+          <p:nvPr/>
+        </p:nvSpPr>
+        <p:spPr>
+          <a:xfrm>
+            <a:off x="365760" y="1463040"/>
+            <a:ext cx="3749040" cy="384048"/>
+          </a:xfrm>
+          <a:prstGeom prst="rect">
+            <a:avLst/>
+          </a:prstGeom>
+          <a:noFill/>
+          <a:ln/>
+        </p:spPr>
+        <p:txBody>
+          <a:bodyPr wrap="square" lIns="0" tIns="0" rIns="0" bIns="0" rtlCol="0" anchor="ctr"/>
+          <a:lstStyle/>
+          <a:p>
+            <a:pPr marL="0" indent="0">
+              <a:buNone/>
+            </a:pPr>
+            <a:r>
+              <a:rPr lang="en-US" sz="1250" b="1" dirty="0">
+                <a:solidFill>
+                  <a:srgbClr val="FFFFFF"/>
+                </a:solidFill>
+                <a:latin typeface="Tahoma" pitchFamily="34" charset="0"/>
+                <a:ea typeface="Tahoma" pitchFamily="34" charset="-122"/>
+                <a:cs typeface="Tahoma" pitchFamily="34" charset="-120"/>
+              </a:rPr>
+              <a:t>Automation workflow</a:t>
+            </a:r>
+            <a:endParaRPr lang="en-US" sz="1250" dirty="0"/>
+          </a:p>
+        </p:txBody>
+      </p:sp>
+      <p:sp>
+        <p:nvSpPr>
+          <p:cNvPr id="11" name="card">
+            <a:extLst>
+              <a:ext uri="{FF2B5EF4-FFF2-40B4-BE49-F238E27FC236}">
+                <a16:creationId xmlns:a16="http://schemas.microsoft.com/office/drawing/2014/main" id="{FBD62423-5C4C-612E-AB8E-2849B2BDF059}"/>
+              </a:ext>
+              <a:ext uri="{C183D7F6-B498-43B3-948B-1728B52AA6E4}">
+                <adec:decorative xmlns:adec="http://schemas.microsoft.com/office/drawing/2017/decorative" val="1"/>
+              </a:ext>
+            </a:extLst>
+          </p:cNvPr>
+          <p:cNvSpPr/>
+          <p:nvPr/>
+        </p:nvSpPr>
+        <p:spPr>
+          <a:xfrm>
+            <a:off x="4709160" y="1463040"/>
+            <a:ext cx="4023360" cy="3063240"/>
+          </a:xfrm>
+          <a:prstGeom prst="rect">
+            <a:avLst/>
+          </a:prstGeom>
+          <a:solidFill>
+            <a:srgbClr val="E8F1FB"/>
+          </a:solidFill>
+          <a:ln w="12700">
+            <a:solidFill>
+              <a:srgbClr val="D7E0EA"/>
+            </a:solidFill>
+            <a:prstDash val="solid"/>
+          </a:ln>
+        </p:spPr>
+        <p:txBody>
+          <a:bodyPr/>
+          <a:lstStyle/>
+          <a:p>
+            <a:endParaRPr lang="en-US"/>
+          </a:p>
+        </p:txBody>
+      </p:sp>
+      <p:sp>
+        <p:nvSpPr>
+          <p:cNvPr id="12" name="panel header">
+            <a:extLst>
+              <a:ext uri="{FF2B5EF4-FFF2-40B4-BE49-F238E27FC236}">
+                <a16:creationId xmlns:a16="http://schemas.microsoft.com/office/drawing/2014/main" id="{0E81DCD1-352D-CE3C-611F-00CAB4346787}"/>
+              </a:ext>
+              <a:ext uri="{C183D7F6-B498-43B3-948B-1728B52AA6E4}">
+                <adec:decorative xmlns:adec="http://schemas.microsoft.com/office/drawing/2017/decorative" val="1"/>
+              </a:ext>
+            </a:extLst>
+          </p:cNvPr>
+          <p:cNvSpPr/>
+          <p:nvPr/>
+        </p:nvSpPr>
+        <p:spPr>
+          <a:xfrm>
+            <a:off x="4709160" y="1463040"/>
+            <a:ext cx="4023360" cy="384048"/>
+          </a:xfrm>
+          <a:prstGeom prst="rect">
+            <a:avLst/>
+          </a:prstGeom>
+          <a:solidFill>
+            <a:srgbClr val="2B7CD3"/>
+          </a:solidFill>
+          <a:ln w="12700">
+            <a:solidFill>
+              <a:srgbClr val="2B7CD3"/>
+            </a:solidFill>
+            <a:prstDash val="solid"/>
+          </a:ln>
+        </p:spPr>
+        <p:txBody>
+          <a:bodyPr/>
+          <a:lstStyle/>
+          <a:p>
+            <a:endParaRPr lang="en-US"/>
+          </a:p>
+        </p:txBody>
+      </p:sp>
+      <p:sp>
+        <p:nvSpPr>
+          <p:cNvPr id="13" name="Text 10">
+            <a:extLst>
+              <a:ext uri="{FF2B5EF4-FFF2-40B4-BE49-F238E27FC236}">
+                <a16:creationId xmlns:a16="http://schemas.microsoft.com/office/drawing/2014/main" id="{67154370-4586-2DF6-0ED7-2070B0E94F1E}"/>
+              </a:ext>
+            </a:extLst>
+          </p:cNvPr>
+          <p:cNvSpPr/>
+          <p:nvPr/>
+        </p:nvSpPr>
+        <p:spPr>
+          <a:xfrm>
+            <a:off x="4846320" y="1463040"/>
+            <a:ext cx="3749040" cy="384048"/>
+          </a:xfrm>
+          <a:prstGeom prst="rect">
+            <a:avLst/>
+          </a:prstGeom>
+          <a:noFill/>
+          <a:ln/>
+        </p:spPr>
+        <p:txBody>
+          <a:bodyPr wrap="square" lIns="0" tIns="0" rIns="0" bIns="0" rtlCol="0" anchor="ctr"/>
+          <a:lstStyle/>
+          <a:p>
+            <a:r>
+              <a:rPr lang="en-US" sz="1250" b="1" dirty="0">
+                <a:solidFill>
+                  <a:srgbClr val="FFFFFF"/>
+                </a:solidFill>
+                <a:latin typeface="Tahoma" pitchFamily="34" charset="0"/>
+                <a:ea typeface="Tahoma" pitchFamily="34" charset="-122"/>
+                <a:cs typeface="Tahoma" pitchFamily="34" charset="-120"/>
+              </a:rPr>
+              <a:t>Result Sent Mail (Test)</a:t>
+            </a:r>
+            <a:endParaRPr lang="en-US" sz="1250" dirty="0"/>
+          </a:p>
+        </p:txBody>
+      </p:sp>
+      <p:pic>
+        <p:nvPicPr>
+          <p:cNvPr id="14" name="Image 1" descr="Result delivered">
+            <a:extLst>
+              <a:ext uri="{FF2B5EF4-FFF2-40B4-BE49-F238E27FC236}">
+                <a16:creationId xmlns:a16="http://schemas.microsoft.com/office/drawing/2014/main" id="{11D9E24C-9A42-76A7-4BF0-F311E4E06DF9}"/>
+              </a:ext>
+            </a:extLst>
+          </p:cNvPr>
+          <p:cNvPicPr>
+            <a:picLocks noChangeAspect="1"/>
+          </p:cNvPicPr>
+          <p:nvPr/>
+        </p:nvPicPr>
+        <p:blipFill>
+          <a:blip r:embed="rId3"/>
+          <a:stretch>
+            <a:fillRect/>
+          </a:stretch>
+        </p:blipFill>
+        <p:spPr>
+          <a:xfrm>
+            <a:off x="4846320" y="1938528"/>
+            <a:ext cx="3108960" cy="2487168"/>
+          </a:xfrm>
+          <a:prstGeom prst="rect">
+            <a:avLst/>
+          </a:prstGeom>
+        </p:spPr>
+      </p:pic>
+      <p:sp>
+        <p:nvSpPr>
+          <p:cNvPr id="15" name="Text 11">
+            <a:extLst>
+              <a:ext uri="{FF2B5EF4-FFF2-40B4-BE49-F238E27FC236}">
+                <a16:creationId xmlns:a16="http://schemas.microsoft.com/office/drawing/2014/main" id="{7DE8CBCF-8A4D-B3F8-4BF8-9C6302AA6FDB}"/>
+              </a:ext>
+              <a:ext uri="{C183D7F6-B498-43B3-948B-1728B52AA6E4}">
+                <adec:decorative xmlns:adec="http://schemas.microsoft.com/office/drawing/2017/decorative" val="0"/>
+              </a:ext>
+            </a:extLst>
+          </p:cNvPr>
+          <p:cNvSpPr/>
+          <p:nvPr/>
+        </p:nvSpPr>
+        <p:spPr>
+          <a:xfrm>
+            <a:off x="411480" y="4572000"/>
+            <a:ext cx="4023360" cy="320040"/>
+          </a:xfrm>
+          <a:prstGeom prst="rect">
+            <a:avLst/>
+          </a:prstGeom>
+          <a:noFill/>
+          <a:ln/>
+        </p:spPr>
+        <p:txBody>
+          <a:bodyPr wrap="square" lIns="0" tIns="0" rIns="0" bIns="0" rtlCol="0" anchor="ctr"/>
+          <a:lstStyle/>
+          <a:p>
+            <a:pPr marL="0" indent="0" algn="ctr">
+              <a:buNone/>
+            </a:pPr>
+            <a:r>
+              <a:rPr lang="en-US" sz="1100" dirty="0">
+                <a:solidFill>
+                  <a:srgbClr val="5B6B7C"/>
+                </a:solidFill>
+                <a:latin typeface="Tahoma" pitchFamily="34" charset="0"/>
+                <a:ea typeface="Tahoma" pitchFamily="34" charset="-122"/>
+                <a:cs typeface="Tahoma" pitchFamily="34" charset="-120"/>
+              </a:rPr>
+              <a:t>Five steps </a:t>
+            </a:r>
+            <a:r>
+              <a:rPr lang="en-US" sz="1100">
+                <a:solidFill>
+                  <a:srgbClr val="5B6B7C"/>
+                </a:solidFill>
+                <a:latin typeface="Tahoma" pitchFamily="34" charset="0"/>
+                <a:ea typeface="Tahoma" pitchFamily="34" charset="-122"/>
+                <a:cs typeface="Tahoma" pitchFamily="34" charset="-120"/>
+              </a:rPr>
+              <a:t>run </a:t>
+            </a:r>
+            <a:r>
+              <a:rPr lang="en-US" sz="1100" dirty="0">
+                <a:solidFill>
+                  <a:srgbClr val="5B6B7C"/>
+                </a:solidFill>
+                <a:latin typeface="Tahoma" pitchFamily="34" charset="0"/>
+                <a:ea typeface="Tahoma" pitchFamily="34" charset="-122"/>
+                <a:cs typeface="Tahoma" pitchFamily="34" charset="-120"/>
+              </a:rPr>
+              <a:t>unattended</a:t>
+            </a:r>
+            <a:r>
+              <a:rPr lang="en-US" sz="1100">
+                <a:solidFill>
+                  <a:srgbClr val="5B6B7C"/>
+                </a:solidFill>
+                <a:latin typeface="Tahoma" pitchFamily="34" charset="0"/>
+                <a:ea typeface="Tahoma" pitchFamily="34" charset="-122"/>
+                <a:cs typeface="Tahoma" pitchFamily="34" charset="-120"/>
+              </a:rPr>
+              <a:t>  /  5 </a:t>
+            </a:r>
+            <a:r>
+              <a:rPr lang="th-TH" sz="1100">
+                <a:solidFill>
+                  <a:srgbClr val="5B6B7C"/>
+                </a:solidFill>
+                <a:latin typeface="Tahoma" pitchFamily="34" charset="0"/>
+                <a:ea typeface="Tahoma" pitchFamily="34" charset="-122"/>
+                <a:cs typeface="Tahoma" pitchFamily="34" charset="-120"/>
+              </a:rPr>
+              <a:t>ขั้นตอนทำงานเอง</a:t>
+            </a:r>
+            <a:endParaRPr lang="en-US" sz="1100" dirty="0"/>
+          </a:p>
+        </p:txBody>
+      </p:sp>
+      <p:sp>
+        <p:nvSpPr>
+          <p:cNvPr id="16" name="Text 12">
+            <a:extLst>
+              <a:ext uri="{FF2B5EF4-FFF2-40B4-BE49-F238E27FC236}">
+                <a16:creationId xmlns:a16="http://schemas.microsoft.com/office/drawing/2014/main" id="{0FB58654-33FA-BF52-76D1-E1E9D893A999}"/>
+              </a:ext>
+              <a:ext uri="{C183D7F6-B498-43B3-948B-1728B52AA6E4}">
+                <adec:decorative xmlns:adec="http://schemas.microsoft.com/office/drawing/2017/decorative" val="0"/>
+              </a:ext>
+            </a:extLst>
+          </p:cNvPr>
+          <p:cNvSpPr/>
+          <p:nvPr/>
+        </p:nvSpPr>
+        <p:spPr>
+          <a:xfrm>
+            <a:off x="4709160" y="4572000"/>
+            <a:ext cx="4023360" cy="320040"/>
+          </a:xfrm>
+          <a:prstGeom prst="rect">
+            <a:avLst/>
+          </a:prstGeom>
+          <a:noFill/>
+          <a:ln/>
+        </p:spPr>
+        <p:txBody>
+          <a:bodyPr wrap="square" lIns="0" tIns="0" rIns="0" bIns="0" rtlCol="0" anchor="ctr"/>
+          <a:lstStyle/>
+          <a:p>
+            <a:pPr marL="0" indent="0" algn="ctr">
+              <a:buNone/>
+            </a:pPr>
+            <a:r>
+              <a:rPr lang="en-US" sz="1100" dirty="0">
+                <a:solidFill>
+                  <a:srgbClr val="5B6B7C"/>
+                </a:solidFill>
+                <a:latin typeface="Tahoma" pitchFamily="34" charset="0"/>
+                <a:ea typeface="Tahoma" pitchFamily="34" charset="-122"/>
+                <a:cs typeface="Tahoma" pitchFamily="34" charset="-120"/>
+              </a:rPr>
+              <a:t>Mail sent to each approver  /  </a:t>
+            </a:r>
+            <a:r>
+              <a:rPr lang="th-TH" sz="1100" dirty="0">
+                <a:solidFill>
+                  <a:srgbClr val="5B6B7C"/>
+                </a:solidFill>
+                <a:latin typeface="Tahoma" pitchFamily="34" charset="0"/>
+                <a:ea typeface="Tahoma" pitchFamily="34" charset="-122"/>
+                <a:cs typeface="Tahoma" pitchFamily="34" charset="-120"/>
+              </a:rPr>
+              <a:t>ส่งเมลถึงผู้อนุมัติอัตโนมัติ</a:t>
+            </a:r>
+            <a:endParaRPr lang="en-US" sz="1100" dirty="0"/>
+          </a:p>
+        </p:txBody>
+      </p:sp>
+      <p:pic>
+        <p:nvPicPr>
+          <p:cNvPr id="20" name="Picture 19">
+            <a:extLst>
+              <a:ext uri="{FF2B5EF4-FFF2-40B4-BE49-F238E27FC236}">
+                <a16:creationId xmlns:a16="http://schemas.microsoft.com/office/drawing/2014/main" id="{8D303473-3042-8EAB-BAED-8F143D0C236A}"/>
+              </a:ext>
+            </a:extLst>
+          </p:cNvPr>
+          <p:cNvPicPr>
+            <a:picLocks noChangeAspect="1"/>
+          </p:cNvPicPr>
+          <p:nvPr/>
+        </p:nvPicPr>
+        <p:blipFill>
+          <a:blip r:embed="rId4"/>
+          <a:stretch>
+            <a:fillRect/>
+          </a:stretch>
+        </p:blipFill>
+        <p:spPr>
+          <a:xfrm>
+            <a:off x="7033260" y="1997465"/>
+            <a:ext cx="1562100" cy="2302238"/>
+          </a:xfrm>
+          <a:prstGeom prst="rect">
+            <a:avLst/>
+          </a:prstGeom>
+          <a:ln>
+            <a:solidFill>
+              <a:schemeClr val="tx1"/>
+            </a:solidFill>
+          </a:ln>
+        </p:spPr>
+      </p:pic>
+      <p:sp>
+        <p:nvSpPr>
+          <p:cNvPr id="21" name="Rectangle 20">
+            <a:extLst>
+              <a:ext uri="{FF2B5EF4-FFF2-40B4-BE49-F238E27FC236}">
+                <a16:creationId xmlns:a16="http://schemas.microsoft.com/office/drawing/2014/main" id="{757A51CD-AA2C-E463-3F50-D55ACA3AF777}"/>
+              </a:ext>
+            </a:extLst>
+          </p:cNvPr>
+          <p:cNvSpPr/>
+          <p:nvPr/>
+        </p:nvSpPr>
+        <p:spPr>
+          <a:xfrm>
+            <a:off x="7056120" y="3083243"/>
+            <a:ext cx="1264920" cy="335280"/>
+          </a:xfrm>
+          <a:prstGeom prst="rect">
+            <a:avLst/>
+          </a:prstGeom>
+          <a:noFill/>
+          <a:ln w="19050">
+            <a:solidFill>
+              <a:srgbClr val="FF0000"/>
+            </a:solidFill>
+          </a:ln>
+        </p:spPr>
+        <p:style>
+          <a:lnRef idx="2">
+            <a:schemeClr val="accent1">
+              <a:shade val="15000"/>
+            </a:schemeClr>
+          </a:lnRef>
+          <a:fillRef idx="1">
+            <a:schemeClr val="accent1"/>
+          </a:fillRef>
+          <a:effectRef idx="0">
+            <a:schemeClr val="accent1"/>
+          </a:effectRef>
+          <a:fontRef idx="minor">
+            <a:schemeClr val="lt1"/>
+          </a:fontRef>
+        </p:style>
+        <p:txBody>
+          <a:bodyPr rtlCol="0" anchor="ctr"/>
+          <a:lstStyle/>
+          <a:p>
+            <a:pPr algn="ctr"/>
+            <a:endParaRPr lang="en-US"/>
+          </a:p>
+        </p:txBody>
+      </p:sp>
+      <p:sp>
+        <p:nvSpPr>
+          <p:cNvPr id="23" name="Rectangle 22">
+            <a:extLst>
+              <a:ext uri="{FF2B5EF4-FFF2-40B4-BE49-F238E27FC236}">
+                <a16:creationId xmlns:a16="http://schemas.microsoft.com/office/drawing/2014/main" id="{09C1AD62-85F7-252D-AD12-5B8386B98B1E}"/>
+              </a:ext>
+            </a:extLst>
+          </p:cNvPr>
+          <p:cNvSpPr/>
+          <p:nvPr/>
+        </p:nvSpPr>
+        <p:spPr>
+          <a:xfrm>
+            <a:off x="7787640" y="2157413"/>
+            <a:ext cx="441960" cy="147637"/>
+          </a:xfrm>
+          <a:prstGeom prst="rect">
+            <a:avLst/>
+          </a:prstGeom>
+          <a:noFill/>
+          <a:ln w="19050">
+            <a:solidFill>
+              <a:srgbClr val="FF0000"/>
+            </a:solidFill>
+          </a:ln>
+        </p:spPr>
+        <p:style>
+          <a:lnRef idx="2">
+            <a:schemeClr val="accent1">
+              <a:shade val="15000"/>
+            </a:schemeClr>
+          </a:lnRef>
+          <a:fillRef idx="1">
+            <a:schemeClr val="accent1"/>
+          </a:fillRef>
+          <a:effectRef idx="0">
+            <a:schemeClr val="accent1"/>
+          </a:effectRef>
+          <a:fontRef idx="minor">
+            <a:schemeClr val="lt1"/>
+          </a:fontRef>
+        </p:style>
+        <p:txBody>
+          <a:bodyPr rtlCol="0" anchor="ctr"/>
+          <a:lstStyle/>
+          <a:p>
+            <a:pPr algn="ctr"/>
+            <a:endParaRPr lang="en-US"/>
+          </a:p>
+        </p:txBody>
+      </p:sp>
+      <p:sp>
+        <p:nvSpPr>
+          <p:cNvPr id="25" name="Rectangle 24">
+            <a:extLst>
+              <a:ext uri="{FF2B5EF4-FFF2-40B4-BE49-F238E27FC236}">
+                <a16:creationId xmlns:a16="http://schemas.microsoft.com/office/drawing/2014/main" id="{68A70F99-87DC-B5FC-977B-D96D532B51D3}"/>
+              </a:ext>
+            </a:extLst>
+          </p:cNvPr>
+          <p:cNvSpPr/>
+          <p:nvPr/>
+        </p:nvSpPr>
+        <p:spPr>
+          <a:xfrm>
+            <a:off x="7076121" y="2667001"/>
+            <a:ext cx="534353" cy="147637"/>
+          </a:xfrm>
+          <a:prstGeom prst="rect">
+            <a:avLst/>
+          </a:prstGeom>
+          <a:noFill/>
+          <a:ln w="19050">
+            <a:solidFill>
+              <a:srgbClr val="FF0000"/>
+            </a:solidFill>
+          </a:ln>
+        </p:spPr>
+        <p:style>
+          <a:lnRef idx="2">
+            <a:schemeClr val="accent1">
+              <a:shade val="15000"/>
+            </a:schemeClr>
+          </a:lnRef>
+          <a:fillRef idx="1">
+            <a:schemeClr val="accent1"/>
+          </a:fillRef>
+          <a:effectRef idx="0">
+            <a:schemeClr val="accent1"/>
+          </a:effectRef>
+          <a:fontRef idx="minor">
+            <a:schemeClr val="lt1"/>
+          </a:fontRef>
+        </p:style>
+        <p:txBody>
+          <a:bodyPr rtlCol="0" anchor="ctr"/>
+          <a:lstStyle/>
+          <a:p>
+            <a:pPr algn="ctr"/>
+            <a:endParaRPr lang="en-US"/>
+          </a:p>
+        </p:txBody>
+      </p:sp>
+      <p:sp>
+        <p:nvSpPr>
+          <p:cNvPr id="26" name="Speech Bubble: Rectangle with Corners Rounded 25">
+            <a:extLst>
+              <a:ext uri="{FF2B5EF4-FFF2-40B4-BE49-F238E27FC236}">
+                <a16:creationId xmlns:a16="http://schemas.microsoft.com/office/drawing/2014/main" id="{4F91F051-0785-CBEB-D034-334C11215533}"/>
+              </a:ext>
+            </a:extLst>
+          </p:cNvPr>
+          <p:cNvSpPr/>
+          <p:nvPr/>
+        </p:nvSpPr>
+        <p:spPr>
+          <a:xfrm>
+            <a:off x="5808345" y="3736975"/>
+            <a:ext cx="1184910" cy="263525"/>
+          </a:xfrm>
+          <a:prstGeom prst="wedgeRoundRectCallout">
+            <a:avLst>
+              <a:gd name="adj1" fmla="val 60482"/>
+              <a:gd name="adj2" fmla="val -180934"/>
+              <a:gd name="adj3" fmla="val 16667"/>
+            </a:avLst>
+          </a:prstGeom>
+        </p:spPr>
+        <p:style>
+          <a:lnRef idx="2">
+            <a:schemeClr val="accent4">
+              <a:shade val="15000"/>
+            </a:schemeClr>
+          </a:lnRef>
+          <a:fillRef idx="1">
+            <a:schemeClr val="accent4"/>
+          </a:fillRef>
+          <a:effectRef idx="0">
+            <a:schemeClr val="accent4"/>
+          </a:effectRef>
+          <a:fontRef idx="minor">
+            <a:schemeClr val="lt1"/>
+          </a:fontRef>
+        </p:style>
+        <p:txBody>
+          <a:bodyPr rtlCol="0" anchor="ctr"/>
+          <a:lstStyle/>
+          <a:p>
+            <a:pPr algn="ctr"/>
+            <a:r>
+              <a:rPr lang="en-US" sz="1200" dirty="0">
+                <a:solidFill>
+                  <a:schemeClr val="tx1"/>
+                </a:solidFill>
+              </a:rPr>
+              <a:t>Application No.</a:t>
+            </a:r>
+          </a:p>
+        </p:txBody>
+      </p:sp>
+      <p:sp>
+        <p:nvSpPr>
+          <p:cNvPr id="28" name="Speech Bubble: Rectangle with Corners Rounded 27">
+            <a:extLst>
+              <a:ext uri="{FF2B5EF4-FFF2-40B4-BE49-F238E27FC236}">
+                <a16:creationId xmlns:a16="http://schemas.microsoft.com/office/drawing/2014/main" id="{44B18E58-A62C-F96B-CCDD-4BE7C33F7FBA}"/>
+              </a:ext>
+            </a:extLst>
+          </p:cNvPr>
+          <p:cNvSpPr/>
+          <p:nvPr/>
+        </p:nvSpPr>
+        <p:spPr>
+          <a:xfrm>
+            <a:off x="6393179" y="1897453"/>
+            <a:ext cx="600075" cy="263525"/>
+          </a:xfrm>
+          <a:prstGeom prst="wedgeRoundRectCallout">
+            <a:avLst>
+              <a:gd name="adj1" fmla="val 179145"/>
+              <a:gd name="adj2" fmla="val 55812"/>
+              <a:gd name="adj3" fmla="val 16667"/>
+            </a:avLst>
+          </a:prstGeom>
+        </p:spPr>
+        <p:style>
+          <a:lnRef idx="2">
+            <a:schemeClr val="accent4">
+              <a:shade val="15000"/>
+            </a:schemeClr>
+          </a:lnRef>
+          <a:fillRef idx="1">
+            <a:schemeClr val="accent4"/>
+          </a:fillRef>
+          <a:effectRef idx="0">
+            <a:schemeClr val="accent4"/>
+          </a:effectRef>
+          <a:fontRef idx="minor">
+            <a:schemeClr val="lt1"/>
+          </a:fontRef>
+        </p:style>
+        <p:txBody>
+          <a:bodyPr rtlCol="0" anchor="ctr"/>
+          <a:lstStyle/>
+          <a:p>
+            <a:pPr algn="ctr"/>
+            <a:r>
+              <a:rPr lang="en-US" sz="1200" dirty="0">
+                <a:solidFill>
+                  <a:schemeClr val="tx1"/>
+                </a:solidFill>
+              </a:rPr>
+              <a:t>Name</a:t>
+            </a:r>
+          </a:p>
+        </p:txBody>
+      </p:sp>
+      <p:pic>
+        <p:nvPicPr>
+          <p:cNvPr id="29" name="Picture 28">
+            <a:extLst>
+              <a:ext uri="{FF2B5EF4-FFF2-40B4-BE49-F238E27FC236}">
+                <a16:creationId xmlns:a16="http://schemas.microsoft.com/office/drawing/2014/main" id="{4EF07B7A-C1C6-0C5F-203C-F955730709F9}"/>
+              </a:ext>
+            </a:extLst>
+          </p:cNvPr>
+          <p:cNvPicPr>
+            <a:picLocks noChangeAspect="1"/>
+          </p:cNvPicPr>
+          <p:nvPr/>
+        </p:nvPicPr>
+        <p:blipFill>
+          <a:blip r:embed="rId5"/>
+          <a:stretch>
+            <a:fillRect/>
+          </a:stretch>
+        </p:blipFill>
+        <p:spPr>
+          <a:xfrm>
+            <a:off x="382907" y="1929874"/>
+            <a:ext cx="3131820" cy="2504476"/>
+          </a:xfrm>
+          <a:prstGeom prst="rect">
+            <a:avLst/>
+          </a:prstGeom>
+        </p:spPr>
+      </p:pic>
+      <p:pic>
+        <p:nvPicPr>
+          <p:cNvPr id="31" name="Picture 30">
+            <a:extLst>
+              <a:ext uri="{FF2B5EF4-FFF2-40B4-BE49-F238E27FC236}">
+                <a16:creationId xmlns:a16="http://schemas.microsoft.com/office/drawing/2014/main" id="{0B52D2F8-0347-4DD1-324F-6251AB228E10}"/>
+              </a:ext>
+            </a:extLst>
+          </p:cNvPr>
+          <p:cNvPicPr>
+            <a:picLocks noChangeAspect="1"/>
+          </p:cNvPicPr>
+          <p:nvPr/>
+        </p:nvPicPr>
+        <p:blipFill>
+          <a:blip r:embed="rId6"/>
+          <a:stretch>
+            <a:fillRect/>
+          </a:stretch>
+        </p:blipFill>
+        <p:spPr>
+          <a:xfrm>
+            <a:off x="3566417" y="1970553"/>
+            <a:ext cx="536700" cy="2431773"/>
+          </a:xfrm>
+          <a:prstGeom prst="rect">
+            <a:avLst/>
+          </a:prstGeom>
+        </p:spPr>
+      </p:pic>
+    </p:spTree>
+    <p:extLst>
+      <p:ext uri="{BB962C8B-B14F-4D97-AF65-F5344CB8AC3E}">
+        <p14:creationId xmlns:p14="http://schemas.microsoft.com/office/powerpoint/2010/main" val="2403614912"/>
       </p:ext>
     </p:extLst>
   </p:cSld>
@@ -3012,14 +4095,14 @@
           <p:nvPr>
             <p:extLst>
               <p:ext uri="{D42A27DB-BD31-4B8C-83A1-F6EECF244321}">
-                <p14:modId xmlns:p14="http://schemas.microsoft.com/office/powerpoint/2010/main" val="709315306"/>
+                <p14:modId xmlns:p14="http://schemas.microsoft.com/office/powerpoint/2010/main" val="1297353345"/>
               </p:ext>
             </p:extLst>
           </p:nvPr>
         </p:nvGraphicFramePr>
         <p:xfrm>
           <a:off x="4406060" y="822958"/>
-          <a:ext cx="4567497" cy="2226634"/>
+          <a:ext cx="4567497" cy="2073251"/>
         </p:xfrm>
         <a:graphic>
           <a:graphicData uri="http://schemas.openxmlformats.org/drawingml/2006/table">
@@ -3028,14 +4111,14 @@
                 <a:tableStyleId>{5C22544A-7EE6-4342-B048-85BDC9FD1C3A}</a:tableStyleId>
               </a:tblPr>
               <a:tblGrid>
-                <a:gridCol w="1522499">
+                <a:gridCol w="537415">
                   <a:extLst>
                     <a:ext uri="{9D8B030D-6E8A-4147-A177-3AD203B41FA5}">
                       <a16:colId xmlns:a16="http://schemas.microsoft.com/office/drawing/2014/main" val="3374087191"/>
                     </a:ext>
                   </a:extLst>
                 </a:gridCol>
-                <a:gridCol w="1522499">
+                <a:gridCol w="2507583">
                   <a:extLst>
                     <a:ext uri="{9D8B030D-6E8A-4147-A177-3AD203B41FA5}">
                       <a16:colId xmlns:a16="http://schemas.microsoft.com/office/drawing/2014/main" val="3706843718"/>
@@ -3105,6 +4188,38 @@
                     <a:bodyPr/>
                     <a:lstStyle/>
                     <a:p>
+                      <a:pPr algn="ctr"/>
+                      <a:r>
+                        <a:rPr lang="th-TH" dirty="0"/>
+                        <a:t>1</a:t>
+                      </a:r>
+                      <a:endParaRPr lang="en-US" dirty="0"/>
+                    </a:p>
+                  </a:txBody>
+                  <a:tcPr/>
+                </a:tc>
+                <a:tc>
+                  <a:txBody>
+                    <a:bodyPr/>
+                    <a:lstStyle/>
+                    <a:p>
+                      <a:pPr marL="0" marR="0" lvl="0" indent="0" algn="l" defTabSz="914400" rtl="0" eaLnBrk="1" fontAlgn="auto" latinLnBrk="0" hangingPunct="1">
+                        <a:lnSpc>
+                          <a:spcPct val="100000"/>
+                        </a:lnSpc>
+                        <a:spcBef>
+                          <a:spcPts val="0"/>
+                        </a:spcBef>
+                        <a:spcAft>
+                          <a:spcPts val="0"/>
+                        </a:spcAft>
+                        <a:buClrTx/>
+                        <a:buSzTx/>
+                        <a:buFontTx/>
+                        <a:buNone/>
+                        <a:tabLst/>
+                        <a:defRPr/>
+                      </a:pPr>
                       <a:r>
                         <a:rPr lang="en-US" sz="1800" b="0" i="0" kern="1200" dirty="0">
                           <a:solidFill>
@@ -3132,16 +4247,6 @@
                   </a:txBody>
                   <a:tcPr/>
                 </a:tc>
-                <a:tc>
-                  <a:txBody>
-                    <a:bodyPr/>
-                    <a:lstStyle/>
-                    <a:p>
-                      <a:endParaRPr lang="en-US" dirty="0"/>
-                    </a:p>
-                  </a:txBody>
-                  <a:tcPr/>
-                </a:tc>
                 <a:extLst>
                   <a:ext uri="{0D108BD9-81ED-4DB2-BD59-A6C34878D82A}">
                     <a16:rowId xmlns:a16="http://schemas.microsoft.com/office/drawing/2014/main" val="543304547"/>
@@ -3154,6 +4259,11 @@
                     <a:bodyPr/>
                     <a:lstStyle/>
                     <a:p>
+                      <a:pPr algn="ctr"/>
+                      <a:r>
+                        <a:rPr lang="th-TH" dirty="0"/>
+                        <a:t>2</a:t>
+                      </a:r>
                       <a:endParaRPr lang="en-US" dirty="0"/>
                     </a:p>
                   </a:txBody>
@@ -3191,6 +4301,11 @@
                     <a:bodyPr/>
                     <a:lstStyle/>
                     <a:p>
+                      <a:pPr algn="ctr"/>
+                      <a:r>
+                        <a:rPr lang="th-TH" dirty="0"/>
+                        <a:t>3</a:t>
+                      </a:r>
                       <a:endParaRPr lang="en-US" dirty="0"/>
                     </a:p>
                   </a:txBody>
@@ -3228,6 +4343,11 @@
                     <a:bodyPr/>
                     <a:lstStyle/>
                     <a:p>
+                      <a:pPr algn="ctr"/>
+                      <a:r>
+                        <a:rPr lang="th-TH" dirty="0"/>
+                        <a:t>4</a:t>
+                      </a:r>
                       <a:endParaRPr lang="en-US" dirty="0"/>
                     </a:p>
                   </a:txBody>
@@ -5870,7 +6990,7 @@
         </p:nvSpPr>
         <p:spPr>
           <a:xfrm>
-            <a:off x="411480" y="868680"/>
+            <a:off x="411480" y="793822"/>
             <a:ext cx="8321040" cy="457200"/>
           </a:xfrm>
           <a:prstGeom prst="rect">
@@ -5887,7 +7007,7 @@
               <a:buNone/>
             </a:pPr>
             <a:r>
-              <a:rPr lang="en-US" sz="1400" b="1">
+              <a:rPr lang="en-US" sz="1400" b="1" dirty="0">
                 <a:solidFill>
                   <a:srgbClr val="2B7CD3"/>
                 </a:solidFill>
@@ -5895,10 +7015,10 @@
                 <a:ea typeface="Tahoma" pitchFamily="34" charset="-122"/>
                 <a:cs typeface="Tahoma" pitchFamily="34" charset="-120"/>
               </a:rPr>
-              <a:t>EVIDENCE : </a:t>
-            </a:r>
-            <a:r>
-              <a:rPr lang="en-US" sz="1400" b="1" dirty="0">
+              <a:t>EVIDENCE : the live workflow and the mail it sends to each approver   </a:t>
+            </a:r>
+            <a:br>
+              <a:rPr lang="th-TH" sz="1400" b="1" dirty="0">
                 <a:solidFill>
                   <a:srgbClr val="2B7CD3"/>
                 </a:solidFill>
@@ -5906,10 +7026,9 @@
                 <a:ea typeface="Tahoma" pitchFamily="34" charset="-122"/>
                 <a:cs typeface="Tahoma" pitchFamily="34" charset="-120"/>
               </a:rPr>
-              <a:t>the </a:t>
-            </a:r>
-            <a:r>
-              <a:rPr lang="en-US" sz="1400" b="1">
+            </a:br>
+            <a:r>
+              <a:rPr lang="th-TH" sz="1400" b="1" dirty="0">
                 <a:solidFill>
                   <a:srgbClr val="2B7CD3"/>
                 </a:solidFill>
@@ -5917,140 +7036,9 @@
                 <a:ea typeface="Tahoma" pitchFamily="34" charset="-122"/>
                 <a:cs typeface="Tahoma" pitchFamily="34" charset="-120"/>
               </a:rPr>
-              <a:t>live workflow and </a:t>
-            </a:r>
-            <a:r>
-              <a:rPr lang="en-US" sz="1400" b="1" dirty="0">
-                <a:solidFill>
-                  <a:srgbClr val="2B7CD3"/>
-                </a:solidFill>
-                <a:latin typeface="Tahoma" pitchFamily="34" charset="0"/>
-                <a:ea typeface="Tahoma" pitchFamily="34" charset="-122"/>
-                <a:cs typeface="Tahoma" pitchFamily="34" charset="-120"/>
-              </a:rPr>
-              <a:t>the </a:t>
-            </a:r>
-            <a:r>
-              <a:rPr lang="en-US" sz="1400" b="1">
-                <a:solidFill>
-                  <a:srgbClr val="2B7CD3"/>
-                </a:solidFill>
-                <a:latin typeface="Tahoma" pitchFamily="34" charset="0"/>
-                <a:ea typeface="Tahoma" pitchFamily="34" charset="-122"/>
-                <a:cs typeface="Tahoma" pitchFamily="34" charset="-120"/>
-              </a:rPr>
-              <a:t>mail</a:t>
-            </a:r>
-            <a:r>
-              <a:rPr lang="en-US" sz="1400" b="1" dirty="0">
-                <a:solidFill>
-                  <a:srgbClr val="2B7CD3"/>
-                </a:solidFill>
-                <a:latin typeface="Tahoma" pitchFamily="34" charset="0"/>
-                <a:ea typeface="Tahoma" pitchFamily="34" charset="-122"/>
-                <a:cs typeface="Tahoma" pitchFamily="34" charset="-120"/>
-              </a:rPr>
-              <a:t> </a:t>
-            </a:r>
-            <a:r>
-              <a:rPr lang="en-US" sz="1400" b="1">
-                <a:solidFill>
-                  <a:srgbClr val="2B7CD3"/>
-                </a:solidFill>
-                <a:latin typeface="Tahoma" pitchFamily="34" charset="0"/>
-                <a:ea typeface="Tahoma" pitchFamily="34" charset="-122"/>
-                <a:cs typeface="Tahoma" pitchFamily="34" charset="-120"/>
-              </a:rPr>
-              <a:t>it sends to each approver  /  </a:t>
-            </a:r>
-            <a:r>
-              <a:rPr lang="th-TH" sz="1400" b="1">
-                <a:solidFill>
-                  <a:srgbClr val="2B7CD3"/>
-                </a:solidFill>
-                <a:latin typeface="Tahoma" pitchFamily="34" charset="0"/>
-                <a:ea typeface="Tahoma" pitchFamily="34" charset="-122"/>
-                <a:cs typeface="Tahoma" pitchFamily="34" charset="-120"/>
-              </a:rPr>
               <a:t>หลักฐาน : ภาพขั้นตอนจริงและอีเมลที่ระบบส่งออกไป</a:t>
             </a:r>
             <a:endParaRPr lang="en-US" sz="1400" dirty="0"/>
-          </a:p>
-        </p:txBody>
-      </p:sp>
-      <p:sp>
-        <p:nvSpPr>
-          <p:cNvPr id="7" name="card">
-            <a:extLst>
-              <a:ext uri="{C183D7F6-B498-43B3-948B-1728B52AA6E4}">
-                <adec:decorative xmlns:adec="http://schemas.microsoft.com/office/drawing/2017/decorative" val="1"/>
-              </a:ext>
-            </a:extLst>
-          </p:cNvPr>
-          <p:cNvSpPr/>
-          <p:nvPr/>
-        </p:nvSpPr>
-        <p:spPr>
-          <a:xfrm>
-            <a:off x="228600" y="1463040"/>
-            <a:ext cx="4023360" cy="3063240"/>
-          </a:xfrm>
-          <a:prstGeom prst="rect">
-            <a:avLst/>
-          </a:prstGeom>
-          <a:solidFill>
-            <a:srgbClr val="F2F6FB"/>
-          </a:solidFill>
-          <a:ln w="12700">
-            <a:solidFill>
-              <a:srgbClr val="D7E0EA"/>
-            </a:solidFill>
-            <a:prstDash val="solid"/>
-          </a:ln>
-        </p:spPr>
-        <p:txBody>
-          <a:bodyPr/>
-          <a:lstStyle/>
-          <a:p>
-            <a:endParaRPr lang="en-US"/>
-          </a:p>
-        </p:txBody>
-      </p:sp>
-      <p:sp>
-        <p:nvSpPr>
-          <p:cNvPr id="8" name="panel header">
-            <a:extLst>
-              <a:ext uri="{C183D7F6-B498-43B3-948B-1728B52AA6E4}">
-                <adec:decorative xmlns:adec="http://schemas.microsoft.com/office/drawing/2017/decorative" val="1"/>
-              </a:ext>
-            </a:extLst>
-          </p:cNvPr>
-          <p:cNvSpPr/>
-          <p:nvPr/>
-        </p:nvSpPr>
-        <p:spPr>
-          <a:xfrm>
-            <a:off x="228600" y="1463040"/>
-            <a:ext cx="4023360" cy="384048"/>
-          </a:xfrm>
-          <a:prstGeom prst="rect">
-            <a:avLst/>
-          </a:prstGeom>
-          <a:solidFill>
-            <a:srgbClr val="0E2A4D"/>
-          </a:solidFill>
-          <a:ln w="12700">
-            <a:solidFill>
-              <a:srgbClr val="0E2A4D"/>
-            </a:solidFill>
-            <a:prstDash val="solid"/>
-          </a:ln>
-        </p:spPr>
-        <p:txBody>
-          <a:bodyPr/>
-          <a:lstStyle/>
-          <a:p>
-            <a:endParaRPr lang="en-US"/>
           </a:p>
         </p:txBody>
       </p:sp>
@@ -6099,82 +7087,103 @@
           </a:p>
         </p:txBody>
       </p:sp>
-      <p:sp>
-        <p:nvSpPr>
-          <p:cNvPr id="11" name="card">
+      <p:grpSp>
+        <p:nvGrpSpPr>
+          <p:cNvPr id="17" name="Group 16">
             <a:extLst>
-              <a:ext uri="{C183D7F6-B498-43B3-948B-1728B52AA6E4}">
-                <adec:decorative xmlns:adec="http://schemas.microsoft.com/office/drawing/2017/decorative" val="1"/>
+              <a:ext uri="{FF2B5EF4-FFF2-40B4-BE49-F238E27FC236}">
+                <a16:creationId xmlns:a16="http://schemas.microsoft.com/office/drawing/2014/main" id="{0FAA59FE-42A3-2389-B290-E9C9298018D3}"/>
               </a:ext>
             </a:extLst>
           </p:cNvPr>
-          <p:cNvSpPr/>
-          <p:nvPr/>
-        </p:nvSpPr>
-        <p:spPr>
-          <a:xfrm>
-            <a:off x="4709160" y="1463040"/>
-            <a:ext cx="4023360" cy="3063240"/>
-          </a:xfrm>
-          <a:prstGeom prst="rect">
-            <a:avLst/>
-          </a:prstGeom>
-          <a:solidFill>
-            <a:srgbClr val="E8F1FB"/>
-          </a:solidFill>
-          <a:ln w="12700">
+          <p:cNvGrpSpPr/>
+          <p:nvPr/>
+        </p:nvGrpSpPr>
+        <p:grpSpPr>
+          <a:xfrm>
+            <a:off x="365760" y="1340756"/>
+            <a:ext cx="8366760" cy="3604370"/>
+            <a:chOff x="4709160" y="1463040"/>
+            <a:chExt cx="4023360" cy="3063240"/>
+          </a:xfrm>
+        </p:grpSpPr>
+        <p:sp>
+          <p:nvSpPr>
+            <p:cNvPr id="11" name="card">
+              <a:extLst>
+                <a:ext uri="{C183D7F6-B498-43B3-948B-1728B52AA6E4}">
+                  <adec:decorative xmlns:adec="http://schemas.microsoft.com/office/drawing/2017/decorative" val="1"/>
+                </a:ext>
+              </a:extLst>
+            </p:cNvPr>
+            <p:cNvSpPr/>
+            <p:nvPr/>
+          </p:nvSpPr>
+          <p:spPr>
+            <a:xfrm>
+              <a:off x="4709160" y="1463040"/>
+              <a:ext cx="4023360" cy="3063240"/>
+            </a:xfrm>
+            <a:prstGeom prst="rect">
+              <a:avLst/>
+            </a:prstGeom>
             <a:solidFill>
-              <a:srgbClr val="D7E0EA"/>
+              <a:srgbClr val="E8F1FB"/>
             </a:solidFill>
-            <a:prstDash val="solid"/>
-          </a:ln>
-        </p:spPr>
-        <p:txBody>
-          <a:bodyPr/>
-          <a:lstStyle/>
-          <a:p>
-            <a:endParaRPr lang="en-US"/>
-          </a:p>
-        </p:txBody>
-      </p:sp>
-      <p:sp>
-        <p:nvSpPr>
-          <p:cNvPr id="12" name="panel header">
-            <a:extLst>
-              <a:ext uri="{C183D7F6-B498-43B3-948B-1728B52AA6E4}">
-                <adec:decorative xmlns:adec="http://schemas.microsoft.com/office/drawing/2017/decorative" val="1"/>
-              </a:ext>
-            </a:extLst>
-          </p:cNvPr>
-          <p:cNvSpPr/>
-          <p:nvPr/>
-        </p:nvSpPr>
-        <p:spPr>
-          <a:xfrm>
-            <a:off x="4709160" y="1463040"/>
-            <a:ext cx="4023360" cy="384048"/>
-          </a:xfrm>
-          <a:prstGeom prst="rect">
-            <a:avLst/>
-          </a:prstGeom>
-          <a:solidFill>
-            <a:srgbClr val="2B7CD3"/>
-          </a:solidFill>
-          <a:ln w="12700">
+            <a:ln w="12700">
+              <a:solidFill>
+                <a:srgbClr val="D7E0EA"/>
+              </a:solidFill>
+              <a:prstDash val="solid"/>
+            </a:ln>
+          </p:spPr>
+          <p:txBody>
+            <a:bodyPr/>
+            <a:lstStyle/>
+            <a:p>
+              <a:endParaRPr lang="en-US"/>
+            </a:p>
+          </p:txBody>
+        </p:sp>
+        <p:sp>
+          <p:nvSpPr>
+            <p:cNvPr id="12" name="panel header">
+              <a:extLst>
+                <a:ext uri="{C183D7F6-B498-43B3-948B-1728B52AA6E4}">
+                  <adec:decorative xmlns:adec="http://schemas.microsoft.com/office/drawing/2017/decorative" val="1"/>
+                </a:ext>
+              </a:extLst>
+            </p:cNvPr>
+            <p:cNvSpPr/>
+            <p:nvPr/>
+          </p:nvSpPr>
+          <p:spPr>
+            <a:xfrm>
+              <a:off x="4709160" y="1463041"/>
+              <a:ext cx="4023360" cy="345548"/>
+            </a:xfrm>
+            <a:prstGeom prst="rect">
+              <a:avLst/>
+            </a:prstGeom>
             <a:solidFill>
               <a:srgbClr val="2B7CD3"/>
             </a:solidFill>
-            <a:prstDash val="solid"/>
-          </a:ln>
-        </p:spPr>
-        <p:txBody>
-          <a:bodyPr/>
-          <a:lstStyle/>
-          <a:p>
-            <a:endParaRPr lang="en-US"/>
-          </a:p>
-        </p:txBody>
-      </p:sp>
+            <a:ln w="12700">
+              <a:solidFill>
+                <a:srgbClr val="2B7CD3"/>
+              </a:solidFill>
+              <a:prstDash val="solid"/>
+            </a:ln>
+          </p:spPr>
+          <p:txBody>
+            <a:bodyPr/>
+            <a:lstStyle/>
+            <a:p>
+              <a:endParaRPr lang="en-US"/>
+            </a:p>
+          </p:txBody>
+        </p:sp>
+      </p:grpSp>
       <p:sp>
         <p:nvSpPr>
           <p:cNvPr id="13" name="Text 10"/>
@@ -6183,8 +7192,8 @@
         </p:nvSpPr>
         <p:spPr>
           <a:xfrm>
-            <a:off x="4846320" y="1463040"/>
-            <a:ext cx="3749040" cy="384048"/>
+            <a:off x="533400" y="1356605"/>
+            <a:ext cx="8077200" cy="384048"/>
           </a:xfrm>
           <a:prstGeom prst="rect">
             <a:avLst/>
@@ -6196,6 +7205,7 @@
           <a:bodyPr wrap="square" lIns="0" tIns="0" rIns="0" bIns="0" rtlCol="0" anchor="ctr"/>
           <a:lstStyle/>
           <a:p>
+            <a:pPr algn="ctr"/>
             <a:r>
               <a:rPr lang="en-US" sz="1250" b="1" dirty="0">
                 <a:solidFill>
@@ -6227,7 +7237,7 @@
         </p:blipFill>
         <p:spPr>
           <a:xfrm>
-            <a:off x="4846320" y="1938528"/>
+            <a:off x="596265" y="1943100"/>
             <a:ext cx="3108960" cy="2487168"/>
           </a:xfrm>
           <a:prstGeom prst="rect">
@@ -6235,95 +7245,6 @@
           </a:prstGeom>
         </p:spPr>
       </p:pic>
-      <p:sp>
-        <p:nvSpPr>
-          <p:cNvPr id="15" name="Text 11">
-            <a:extLst>
-              <a:ext uri="{C183D7F6-B498-43B3-948B-1728B52AA6E4}">
-                <adec:decorative xmlns:adec="http://schemas.microsoft.com/office/drawing/2017/decorative" val="0"/>
-              </a:ext>
-            </a:extLst>
-          </p:cNvPr>
-          <p:cNvSpPr/>
-          <p:nvPr/>
-        </p:nvSpPr>
-        <p:spPr>
-          <a:xfrm>
-            <a:off x="411480" y="4572000"/>
-            <a:ext cx="4023360" cy="320040"/>
-          </a:xfrm>
-          <a:prstGeom prst="rect">
-            <a:avLst/>
-          </a:prstGeom>
-          <a:noFill/>
-          <a:ln/>
-        </p:spPr>
-        <p:txBody>
-          <a:bodyPr wrap="square" lIns="0" tIns="0" rIns="0" bIns="0" rtlCol="0" anchor="ctr"/>
-          <a:lstStyle/>
-          <a:p>
-            <a:pPr marL="0" indent="0" algn="ctr">
-              <a:buNone/>
-            </a:pPr>
-            <a:r>
-              <a:rPr lang="en-US" sz="1100" dirty="0">
-                <a:solidFill>
-                  <a:srgbClr val="5B6B7C"/>
-                </a:solidFill>
-                <a:latin typeface="Tahoma" pitchFamily="34" charset="0"/>
-                <a:ea typeface="Tahoma" pitchFamily="34" charset="-122"/>
-                <a:cs typeface="Tahoma" pitchFamily="34" charset="-120"/>
-              </a:rPr>
-              <a:t>Five steps </a:t>
-            </a:r>
-            <a:r>
-              <a:rPr lang="en-US" sz="1100">
-                <a:solidFill>
-                  <a:srgbClr val="5B6B7C"/>
-                </a:solidFill>
-                <a:latin typeface="Tahoma" pitchFamily="34" charset="0"/>
-                <a:ea typeface="Tahoma" pitchFamily="34" charset="-122"/>
-                <a:cs typeface="Tahoma" pitchFamily="34" charset="-120"/>
-              </a:rPr>
-              <a:t>run </a:t>
-            </a:r>
-            <a:r>
-              <a:rPr lang="en-US" sz="1100" dirty="0">
-                <a:solidFill>
-                  <a:srgbClr val="5B6B7C"/>
-                </a:solidFill>
-                <a:latin typeface="Tahoma" pitchFamily="34" charset="0"/>
-                <a:ea typeface="Tahoma" pitchFamily="34" charset="-122"/>
-                <a:cs typeface="Tahoma" pitchFamily="34" charset="-120"/>
-              </a:rPr>
-              <a:t>unattended</a:t>
-            </a:r>
-            <a:r>
-              <a:rPr lang="en-US" sz="1100">
-                <a:solidFill>
-                  <a:srgbClr val="5B6B7C"/>
-                </a:solidFill>
-                <a:latin typeface="Tahoma" pitchFamily="34" charset="0"/>
-                <a:ea typeface="Tahoma" pitchFamily="34" charset="-122"/>
-                <a:cs typeface="Tahoma" pitchFamily="34" charset="-120"/>
-              </a:rPr>
-              <a:t>  /  5 </a:t>
-            </a:r>
-            <a:r>
-              <a:rPr lang="th-TH" sz="1100">
-                <a:solidFill>
-                  <a:srgbClr val="5B6B7C"/>
-                </a:solidFill>
-                <a:latin typeface="Tahoma" pitchFamily="34" charset="0"/>
-                <a:ea typeface="Tahoma" pitchFamily="34" charset="-122"/>
-                <a:cs typeface="Tahoma" pitchFamily="34" charset="-120"/>
-              </a:rPr>
-              <a:t>ขั้นตอนทำงานเอง</a:t>
-            </a:r>
-            <a:endParaRPr lang="en-US" sz="1100" dirty="0"/>
-          </a:p>
-        </p:txBody>
-      </p:sp>
       <p:sp>
         <p:nvSpPr>
           <p:cNvPr id="16" name="Text 12">
@@ -6380,197 +7301,218 @@
           </a:p>
         </p:txBody>
       </p:sp>
-      <p:pic>
-        <p:nvPicPr>
-          <p:cNvPr id="20" name="Picture 19">
+      <p:grpSp>
+        <p:nvGrpSpPr>
+          <p:cNvPr id="10" name="Group 9">
             <a:extLst>
               <a:ext uri="{FF2B5EF4-FFF2-40B4-BE49-F238E27FC236}">
-                <a16:creationId xmlns:a16="http://schemas.microsoft.com/office/drawing/2014/main" id="{107E1089-0570-64D3-FBB4-D1EA0255CD11}"/>
+                <a16:creationId xmlns:a16="http://schemas.microsoft.com/office/drawing/2014/main" id="{90EF936F-2015-62A8-BB3E-20F6D1725BA3}"/>
               </a:ext>
             </a:extLst>
           </p:cNvPr>
-          <p:cNvPicPr>
-            <a:picLocks noChangeAspect="1"/>
-          </p:cNvPicPr>
-          <p:nvPr/>
-        </p:nvPicPr>
-        <p:blipFill>
-          <a:blip r:embed="rId4"/>
-          <a:stretch>
-            <a:fillRect/>
-          </a:stretch>
-        </p:blipFill>
-        <p:spPr>
-          <a:xfrm>
-            <a:off x="7033260" y="1997465"/>
+          <p:cNvGrpSpPr/>
+          <p:nvPr/>
+        </p:nvGrpSpPr>
+        <p:grpSpPr>
+          <a:xfrm>
+            <a:off x="5707380" y="2029215"/>
             <a:ext cx="1562100" cy="2302238"/>
-          </a:xfrm>
-          <a:prstGeom prst="rect">
-            <a:avLst/>
-          </a:prstGeom>
-          <a:ln>
-            <a:solidFill>
-              <a:schemeClr val="tx1"/>
-            </a:solidFill>
-          </a:ln>
-        </p:spPr>
-      </p:pic>
-      <p:sp>
-        <p:nvSpPr>
-          <p:cNvPr id="21" name="Rectangle 20">
-            <a:extLst>
-              <a:ext uri="{FF2B5EF4-FFF2-40B4-BE49-F238E27FC236}">
-                <a16:creationId xmlns:a16="http://schemas.microsoft.com/office/drawing/2014/main" id="{262058A5-DB76-FF5F-287E-AB3AD058EF48}"/>
-              </a:ext>
-            </a:extLst>
-          </p:cNvPr>
-          <p:cNvSpPr/>
-          <p:nvPr/>
-        </p:nvSpPr>
-        <p:spPr>
-          <a:xfrm>
-            <a:off x="7056120" y="3083243"/>
-            <a:ext cx="1264920" cy="335280"/>
-          </a:xfrm>
-          <a:prstGeom prst="rect">
-            <a:avLst/>
-          </a:prstGeom>
-          <a:noFill/>
-          <a:ln w="19050">
-            <a:solidFill>
-              <a:srgbClr val="FF0000"/>
-            </a:solidFill>
-          </a:ln>
-        </p:spPr>
-        <p:style>
-          <a:lnRef idx="2">
-            <a:schemeClr val="accent1">
-              <a:shade val="15000"/>
-            </a:schemeClr>
-          </a:lnRef>
-          <a:fillRef idx="1">
-            <a:schemeClr val="accent1"/>
-          </a:fillRef>
-          <a:effectRef idx="0">
-            <a:schemeClr val="accent1"/>
-          </a:effectRef>
-          <a:fontRef idx="minor">
-            <a:schemeClr val="lt1"/>
-          </a:fontRef>
-        </p:style>
-        <p:txBody>
-          <a:bodyPr rtlCol="0" anchor="ctr"/>
-          <a:lstStyle/>
-          <a:p>
-            <a:pPr algn="ctr"/>
-            <a:endParaRPr lang="en-US"/>
-          </a:p>
-        </p:txBody>
-      </p:sp>
-      <p:sp>
-        <p:nvSpPr>
-          <p:cNvPr id="23" name="Rectangle 22">
-            <a:extLst>
-              <a:ext uri="{FF2B5EF4-FFF2-40B4-BE49-F238E27FC236}">
-                <a16:creationId xmlns:a16="http://schemas.microsoft.com/office/drawing/2014/main" id="{6B124C12-277D-DD42-8F8B-5E7866F077DD}"/>
-              </a:ext>
-            </a:extLst>
-          </p:cNvPr>
-          <p:cNvSpPr/>
-          <p:nvPr/>
-        </p:nvSpPr>
-        <p:spPr>
-          <a:xfrm>
-            <a:off x="7787640" y="2157413"/>
-            <a:ext cx="441960" cy="147637"/>
-          </a:xfrm>
-          <a:prstGeom prst="rect">
-            <a:avLst/>
-          </a:prstGeom>
-          <a:noFill/>
-          <a:ln w="19050">
-            <a:solidFill>
-              <a:srgbClr val="FF0000"/>
-            </a:solidFill>
-          </a:ln>
-        </p:spPr>
-        <p:style>
-          <a:lnRef idx="2">
-            <a:schemeClr val="accent1">
-              <a:shade val="15000"/>
-            </a:schemeClr>
-          </a:lnRef>
-          <a:fillRef idx="1">
-            <a:schemeClr val="accent1"/>
-          </a:fillRef>
-          <a:effectRef idx="0">
-            <a:schemeClr val="accent1"/>
-          </a:effectRef>
-          <a:fontRef idx="minor">
-            <a:schemeClr val="lt1"/>
-          </a:fontRef>
-        </p:style>
-        <p:txBody>
-          <a:bodyPr rtlCol="0" anchor="ctr"/>
-          <a:lstStyle/>
-          <a:p>
-            <a:pPr algn="ctr"/>
-            <a:endParaRPr lang="en-US"/>
-          </a:p>
-        </p:txBody>
-      </p:sp>
-      <p:sp>
-        <p:nvSpPr>
-          <p:cNvPr id="25" name="Rectangle 24">
-            <a:extLst>
-              <a:ext uri="{FF2B5EF4-FFF2-40B4-BE49-F238E27FC236}">
-                <a16:creationId xmlns:a16="http://schemas.microsoft.com/office/drawing/2014/main" id="{05CB78B4-2070-A2DE-1EA2-DA3417D6A407}"/>
-              </a:ext>
-            </a:extLst>
-          </p:cNvPr>
-          <p:cNvSpPr/>
-          <p:nvPr/>
-        </p:nvSpPr>
-        <p:spPr>
-          <a:xfrm>
-            <a:off x="7076121" y="2667001"/>
-            <a:ext cx="534353" cy="147637"/>
-          </a:xfrm>
-          <a:prstGeom prst="rect">
-            <a:avLst/>
-          </a:prstGeom>
-          <a:noFill/>
-          <a:ln w="19050">
-            <a:solidFill>
-              <a:srgbClr val="FF0000"/>
-            </a:solidFill>
-          </a:ln>
-        </p:spPr>
-        <p:style>
-          <a:lnRef idx="2">
-            <a:schemeClr val="accent1">
-              <a:shade val="15000"/>
-            </a:schemeClr>
-          </a:lnRef>
-          <a:fillRef idx="1">
-            <a:schemeClr val="accent1"/>
-          </a:fillRef>
-          <a:effectRef idx="0">
-            <a:schemeClr val="accent1"/>
-          </a:effectRef>
-          <a:fontRef idx="minor">
-            <a:schemeClr val="lt1"/>
-          </a:fontRef>
-        </p:style>
-        <p:txBody>
-          <a:bodyPr rtlCol="0" anchor="ctr"/>
-          <a:lstStyle/>
-          <a:p>
-            <a:pPr algn="ctr"/>
-            <a:endParaRPr lang="en-US"/>
-          </a:p>
-        </p:txBody>
-      </p:sp>
+            <a:chOff x="7033260" y="1997465"/>
+            <a:chExt cx="1562100" cy="2302238"/>
+          </a:xfrm>
+        </p:grpSpPr>
+        <p:pic>
+          <p:nvPicPr>
+            <p:cNvPr id="20" name="Picture 19">
+              <a:extLst>
+                <a:ext uri="{FF2B5EF4-FFF2-40B4-BE49-F238E27FC236}">
+                  <a16:creationId xmlns:a16="http://schemas.microsoft.com/office/drawing/2014/main" id="{107E1089-0570-64D3-FBB4-D1EA0255CD11}"/>
+                </a:ext>
+              </a:extLst>
+            </p:cNvPr>
+            <p:cNvPicPr>
+              <a:picLocks noChangeAspect="1"/>
+            </p:cNvPicPr>
+            <p:nvPr/>
+          </p:nvPicPr>
+          <p:blipFill>
+            <a:blip r:embed="rId4"/>
+            <a:stretch>
+              <a:fillRect/>
+            </a:stretch>
+          </p:blipFill>
+          <p:spPr>
+            <a:xfrm>
+              <a:off x="7033260" y="1997465"/>
+              <a:ext cx="1562100" cy="2302238"/>
+            </a:xfrm>
+            <a:prstGeom prst="rect">
+              <a:avLst/>
+            </a:prstGeom>
+            <a:ln>
+              <a:solidFill>
+                <a:schemeClr val="tx1"/>
+              </a:solidFill>
+            </a:ln>
+          </p:spPr>
+        </p:pic>
+        <p:sp>
+          <p:nvSpPr>
+            <p:cNvPr id="21" name="Rectangle 20">
+              <a:extLst>
+                <a:ext uri="{FF2B5EF4-FFF2-40B4-BE49-F238E27FC236}">
+                  <a16:creationId xmlns:a16="http://schemas.microsoft.com/office/drawing/2014/main" id="{262058A5-DB76-FF5F-287E-AB3AD058EF48}"/>
+                </a:ext>
+              </a:extLst>
+            </p:cNvPr>
+            <p:cNvSpPr/>
+            <p:nvPr/>
+          </p:nvSpPr>
+          <p:spPr>
+            <a:xfrm>
+              <a:off x="7056120" y="3083243"/>
+              <a:ext cx="1264920" cy="335280"/>
+            </a:xfrm>
+            <a:prstGeom prst="rect">
+              <a:avLst/>
+            </a:prstGeom>
+            <a:noFill/>
+            <a:ln w="19050">
+              <a:solidFill>
+                <a:srgbClr val="FF0000"/>
+              </a:solidFill>
+            </a:ln>
+          </p:spPr>
+          <p:style>
+            <a:lnRef idx="2">
+              <a:schemeClr val="accent1">
+                <a:shade val="15000"/>
+              </a:schemeClr>
+            </a:lnRef>
+            <a:fillRef idx="1">
+              <a:schemeClr val="accent1"/>
+            </a:fillRef>
+            <a:effectRef idx="0">
+              <a:schemeClr val="accent1"/>
+            </a:effectRef>
+            <a:fontRef idx="minor">
+              <a:schemeClr val="lt1"/>
+            </a:fontRef>
+          </p:style>
+          <p:txBody>
+            <a:bodyPr rtlCol="0" anchor="ctr"/>
+            <a:lstStyle/>
+            <a:p>
+              <a:pPr algn="ctr"/>
+              <a:endParaRPr lang="en-US"/>
+            </a:p>
+          </p:txBody>
+        </p:sp>
+        <p:sp>
+          <p:nvSpPr>
+            <p:cNvPr id="23" name="Rectangle 22">
+              <a:extLst>
+                <a:ext uri="{FF2B5EF4-FFF2-40B4-BE49-F238E27FC236}">
+                  <a16:creationId xmlns:a16="http://schemas.microsoft.com/office/drawing/2014/main" id="{6B124C12-277D-DD42-8F8B-5E7866F077DD}"/>
+                </a:ext>
+              </a:extLst>
+            </p:cNvPr>
+            <p:cNvSpPr/>
+            <p:nvPr/>
+          </p:nvSpPr>
+          <p:spPr>
+            <a:xfrm>
+              <a:off x="7787640" y="2157413"/>
+              <a:ext cx="441960" cy="147637"/>
+            </a:xfrm>
+            <a:prstGeom prst="rect">
+              <a:avLst/>
+            </a:prstGeom>
+            <a:noFill/>
+            <a:ln w="19050">
+              <a:solidFill>
+                <a:srgbClr val="FF0000"/>
+              </a:solidFill>
+            </a:ln>
+          </p:spPr>
+          <p:style>
+            <a:lnRef idx="2">
+              <a:schemeClr val="accent1">
+                <a:shade val="15000"/>
+              </a:schemeClr>
+            </a:lnRef>
+            <a:fillRef idx="1">
+              <a:schemeClr val="accent1"/>
+            </a:fillRef>
+            <a:effectRef idx="0">
+              <a:schemeClr val="accent1"/>
+            </a:effectRef>
+            <a:fontRef idx="minor">
+              <a:schemeClr val="lt1"/>
+            </a:fontRef>
+          </p:style>
+          <p:txBody>
+            <a:bodyPr rtlCol="0" anchor="ctr"/>
+            <a:lstStyle/>
+            <a:p>
+              <a:pPr algn="ctr"/>
+              <a:endParaRPr lang="en-US"/>
+            </a:p>
+          </p:txBody>
+        </p:sp>
+        <p:sp>
+          <p:nvSpPr>
+            <p:cNvPr id="25" name="Rectangle 24">
+              <a:extLst>
+                <a:ext uri="{FF2B5EF4-FFF2-40B4-BE49-F238E27FC236}">
+                  <a16:creationId xmlns:a16="http://schemas.microsoft.com/office/drawing/2014/main" id="{05CB78B4-2070-A2DE-1EA2-DA3417D6A407}"/>
+                </a:ext>
+              </a:extLst>
+            </p:cNvPr>
+            <p:cNvSpPr/>
+            <p:nvPr/>
+          </p:nvSpPr>
+          <p:spPr>
+            <a:xfrm>
+              <a:off x="7076121" y="2667001"/>
+              <a:ext cx="534353" cy="147637"/>
+            </a:xfrm>
+            <a:prstGeom prst="rect">
+              <a:avLst/>
+            </a:prstGeom>
+            <a:noFill/>
+            <a:ln w="19050">
+              <a:solidFill>
+                <a:srgbClr val="FF0000"/>
+              </a:solidFill>
+            </a:ln>
+          </p:spPr>
+          <p:style>
+            <a:lnRef idx="2">
+              <a:schemeClr val="accent1">
+                <a:shade val="15000"/>
+              </a:schemeClr>
+            </a:lnRef>
+            <a:fillRef idx="1">
+              <a:schemeClr val="accent1"/>
+            </a:fillRef>
+            <a:effectRef idx="0">
+              <a:schemeClr val="accent1"/>
+            </a:effectRef>
+            <a:fontRef idx="minor">
+              <a:schemeClr val="lt1"/>
+            </a:fontRef>
+          </p:style>
+          <p:txBody>
+            <a:bodyPr rtlCol="0" anchor="ctr"/>
+            <a:lstStyle/>
+            <a:p>
+              <a:pPr algn="ctr"/>
+              <a:endParaRPr lang="en-US"/>
+            </a:p>
+          </p:txBody>
+        </p:sp>
+      </p:grpSp>
       <p:sp>
         <p:nvSpPr>
           <p:cNvPr id="26" name="Speech Bubble: Rectangle with Corners Rounded 25">
@@ -6685,66 +7627,6 @@
           </a:p>
         </p:txBody>
       </p:sp>
-      <p:pic>
-        <p:nvPicPr>
-          <p:cNvPr id="29" name="Picture 28">
-            <a:extLst>
-              <a:ext uri="{FF2B5EF4-FFF2-40B4-BE49-F238E27FC236}">
-                <a16:creationId xmlns:a16="http://schemas.microsoft.com/office/drawing/2014/main" id="{83503E59-AEE5-A88C-F6BF-1E5926D746C9}"/>
-              </a:ext>
-            </a:extLst>
-          </p:cNvPr>
-          <p:cNvPicPr>
-            <a:picLocks noChangeAspect="1"/>
-          </p:cNvPicPr>
-          <p:nvPr/>
-        </p:nvPicPr>
-        <p:blipFill>
-          <a:blip r:embed="rId5"/>
-          <a:stretch>
-            <a:fillRect/>
-          </a:stretch>
-        </p:blipFill>
-        <p:spPr>
-          <a:xfrm>
-            <a:off x="382907" y="1929874"/>
-            <a:ext cx="3131820" cy="2504476"/>
-          </a:xfrm>
-          <a:prstGeom prst="rect">
-            <a:avLst/>
-          </a:prstGeom>
-        </p:spPr>
-      </p:pic>
-      <p:pic>
-        <p:nvPicPr>
-          <p:cNvPr id="31" name="Picture 30">
-            <a:extLst>
-              <a:ext uri="{FF2B5EF4-FFF2-40B4-BE49-F238E27FC236}">
-                <a16:creationId xmlns:a16="http://schemas.microsoft.com/office/drawing/2014/main" id="{FFC6292D-8A78-FD25-5DD3-EFFB019CE3E2}"/>
-              </a:ext>
-            </a:extLst>
-          </p:cNvPr>
-          <p:cNvPicPr>
-            <a:picLocks noChangeAspect="1"/>
-          </p:cNvPicPr>
-          <p:nvPr/>
-        </p:nvPicPr>
-        <p:blipFill>
-          <a:blip r:embed="rId6"/>
-          <a:stretch>
-            <a:fillRect/>
-          </a:stretch>
-        </p:blipFill>
-        <p:spPr>
-          <a:xfrm>
-            <a:off x="3566417" y="1970553"/>
-            <a:ext cx="536700" cy="2431773"/>
-          </a:xfrm>
-          <a:prstGeom prst="rect">
-            <a:avLst/>
-          </a:prstGeom>
-        </p:spPr>
-      </p:pic>
     </p:spTree>
   </p:cSld>
   <p:clrMapOvr>
